--- a/healthiar_hessen.pptx
+++ b/healthiar_hessen.pptx
@@ -14,7 +14,6 @@
     <p:sldId id="262" r:id="rId8"/>
     <p:sldId id="263" r:id="rId9"/>
     <p:sldId id="264" r:id="rId10"/>
-    <p:sldId id="265" r:id="rId11"/>
   </p:sldIdLst>
   <p:sldSz cx="9144000" cy="5143500" type="screen16x9"/>
   <p:notesSz cx="6858000" cy="9144000"/>
@@ -3124,7 +3123,7 @@
             </a:pPr>
             <a:r>
               <a:rPr/>
-              <a:t>Healthiar Hessen: Lärmbelastung und Gesundheitsauswirkungen</a:t>
+              <a:t>Krankheitslast durch Umgebungslärm in Hessen</a:t>
             </a:r>
           </a:p>
         </p:txBody>
@@ -3161,83 +3160,6 @@
           </a:p>
         </p:txBody>
       </p:sp>
-    </p:spTree>
-  </p:cSld>
-</p:sld>
-</file>
-
-<file path=ppt/slides/slide10.xml><?xml version="1.0" encoding="utf-8"?>
-<p:sld xmlns:a="http://schemas.openxmlformats.org/drawingml/2006/main" xmlns:r="http://schemas.openxmlformats.org/officeDocument/2006/relationships" xmlns:p="http://schemas.openxmlformats.org/presentationml/2006/main">
-  <p:cSld>
-    <p:spTree>
-      <p:nvGrpSpPr>
-        <p:cNvPr id="1" name=""/>
-        <p:cNvGrpSpPr/>
-        <p:nvPr/>
-      </p:nvGrpSpPr>
-      <p:grpSpPr>
-        <a:xfrm>
-          <a:off x="0" y="0"/>
-          <a:ext cx="0" cy="0"/>
-          <a:chOff x="0" y="0"/>
-          <a:chExt cx="0" cy="0"/>
-        </a:xfrm>
-      </p:grpSpPr>
-      <p:sp>
-        <p:nvSpPr>
-          <p:cNvPr id="2" name="Title 1"/>
-          <p:cNvSpPr>
-            <a:spLocks noGrp="1"/>
-          </p:cNvSpPr>
-          <p:nvPr>
-            <p:ph type="title"/>
-          </p:nvPr>
-        </p:nvSpPr>
-        <p:spPr/>
-        <p:txBody>
-          <a:bodyPr/>
-          <a:lstStyle/>
-          <a:p>
-            <a:pPr lvl="0" indent="0" marL="0">
-              <a:buNone/>
-            </a:pPr>
-            <a:r>
-              <a:rPr/>
-              <a:t>Gesundheitsauswirkungen im Kreis Groß-Gerau</a:t>
-            </a:r>
-          </a:p>
-        </p:txBody>
-      </p:sp>
-      <p:pic>
-        <p:nvPicPr>
-          <p:cNvPr descr="healthiar_hessen_files/figure-pptx/plot-exposure-kreis-gg-1.png" id="0" name="Picture 1"/>
-          <p:cNvPicPr>
-            <a:picLocks noGrp="1" noChangeAspect="1"/>
-          </p:cNvPicPr>
-          <p:nvPr/>
-        </p:nvPicPr>
-        <p:blipFill>
-          <a:blip r:embed="rId2"/>
-          <a:stretch>
-            <a:fillRect/>
-          </a:stretch>
-        </p:blipFill>
-        <p:spPr bwMode="auto">
-          <a:xfrm>
-            <a:off x="1181100" y="1193800"/>
-            <a:ext cx="6781800" cy="3390900"/>
-          </a:xfrm>
-          <a:prstGeom prst="rect">
-            <a:avLst/>
-          </a:prstGeom>
-          <a:noFill/>
-          <a:ln w="9525">
-            <a:noFill/>
-            <a:headEnd/>
-            <a:tailEnd/>
-          </a:ln>
-        </p:spPr>
-      </p:pic>
     </p:spTree>
   </p:cSld>
 </p:sld>
@@ -3262,6 +3184,31 @@
       </p:grpSpPr>
       <p:sp>
         <p:nvSpPr>
+          <p:cNvPr id="2" name="Title 1"/>
+          <p:cNvSpPr>
+            <a:spLocks noGrp="1"/>
+          </p:cNvSpPr>
+          <p:nvPr>
+            <p:ph type="title"/>
+          </p:nvPr>
+        </p:nvSpPr>
+        <p:spPr/>
+        <p:txBody>
+          <a:bodyPr/>
+          <a:lstStyle/>
+          <a:p>
+            <a:pPr lvl="0" indent="0" marL="0">
+              <a:buNone/>
+            </a:pPr>
+            <a:r>
+              <a:rPr/>
+              <a:t>Einführung</a:t>
+            </a:r>
+          </a:p>
+        </p:txBody>
+      </p:sp>
+      <p:sp>
+        <p:nvSpPr>
           <p:cNvPr id="3" name="Content Placeholder 2"/>
           <p:cNvSpPr>
             <a:spLocks noGrp="1"/>
@@ -3280,7 +3227,7 @@
             </a:pPr>
             <a:r>
               <a:rPr/>
-              <a:t>markdown Kopieren</a:t>
+              <a:t>Dieses Dokument analysiert die Lärmbelastung in Hessen und berechnet die damit verbundenen Gesundheitsauswirkungen. Die Analyse basiert auf Daten des HLNUG und ETCHE-Funktionen.</a:t>
             </a:r>
           </a:p>
         </p:txBody>
@@ -3327,7 +3274,7 @@
             </a:pPr>
             <a:r>
               <a:rPr/>
-              <a:t>Einführung</a:t>
+              <a:t>Daten laden und vorbereiten</a:t>
             </a:r>
           </a:p>
         </p:txBody>
@@ -3352,7 +3299,7 @@
             </a:pPr>
             <a:r>
               <a:rPr/>
-              <a:t>Dieses Dokument analysiert die Lärmbelastung in Hessen und berechnet die damit verbundenen Gesundheitsauswirkungen. Die Analyse basiert auf Daten des HLNUG und ETCHE-Funktionen.</a:t>
+              <a:t>ETCHE-, HLNUG- sowie Destatis Daten laden.</a:t>
             </a:r>
           </a:p>
         </p:txBody>
@@ -3399,7 +3346,7 @@
             </a:pPr>
             <a:r>
               <a:rPr/>
-              <a:t>Daten laden und vorbereiten</a:t>
+              <a:t>Expositionsdaten aufbereiten</a:t>
             </a:r>
           </a:p>
         </p:txBody>
@@ -3424,7 +3371,7 @@
             </a:pPr>
             <a:r>
               <a:rPr/>
-              <a:t>ETCHE-, HLNUG- sowie Destatis Daten laden.</a:t>
+              <a:t>Möglichst alle Daten sollen im long-format verfügbare sein.</a:t>
             </a:r>
           </a:p>
         </p:txBody>
@@ -3471,7 +3418,7 @@
             </a:pPr>
             <a:r>
               <a:rPr/>
-              <a:t>Expositionsdaten aufbereiten</a:t>
+              <a:t>Gesundheitsauswirkungen berechnen</a:t>
             </a:r>
           </a:p>
         </p:txBody>
@@ -3496,7 +3443,7 @@
             </a:pPr>
             <a:r>
               <a:rPr/>
-              <a:t>Möglichst alle Daten sollen im long-format verfügbare sein.</a:t>
+              <a:t>Funktion zur Berechnung der Gesundheitsauswirkungen</a:t>
             </a:r>
           </a:p>
         </p:txBody>
@@ -3543,32 +3490,7 @@
             </a:pPr>
             <a:r>
               <a:rPr/>
-              <a:t>Gesundheitsauswirkungen berechnen</a:t>
-            </a:r>
-          </a:p>
-        </p:txBody>
-      </p:sp>
-      <p:sp>
-        <p:nvSpPr>
-          <p:cNvPr id="3" name="Content Placeholder 2"/>
-          <p:cNvSpPr>
-            <a:spLocks noGrp="1"/>
-          </p:cNvSpPr>
-          <p:nvPr>
-            <p:ph idx="1"/>
-          </p:nvPr>
-        </p:nvSpPr>
-        <p:spPr/>
-        <p:txBody>
-          <a:bodyPr/>
-          <a:lstStyle/>
-          <a:p>
-            <a:pPr lvl="0" indent="0" marL="0">
-              <a:buNone/>
-            </a:pPr>
-            <a:r>
-              <a:rPr/>
-              <a:t>Funktion zur Berechnung der Gesundheitsauswirkungen</a:t>
+              <a:t>Expositionsdaten und ERF-Funktionen zusammenführen</a:t>
             </a:r>
           </a:p>
         </p:txBody>
@@ -3615,7 +3537,32 @@
             </a:pPr>
             <a:r>
               <a:rPr/>
-              <a:t>Expositionsdaten und ERF-Funktionen zusammenführen</a:t>
+              <a:t>Gesundheitsauswirkungen für verschiedene Lärmquellen berechnen</a:t>
+            </a:r>
+          </a:p>
+        </p:txBody>
+      </p:sp>
+      <p:sp>
+        <p:nvSpPr>
+          <p:cNvPr id="3" name="Content Placeholder 2"/>
+          <p:cNvSpPr>
+            <a:spLocks noGrp="1"/>
+          </p:cNvSpPr>
+          <p:nvPr>
+            <p:ph idx="1"/>
+          </p:nvPr>
+        </p:nvSpPr>
+        <p:spPr/>
+        <p:txBody>
+          <a:bodyPr/>
+          <a:lstStyle/>
+          <a:p>
+            <a:pPr lvl="0" indent="0" marL="0">
+              <a:buNone/>
+            </a:pPr>
+            <a:r>
+              <a:rPr/>
+              <a:t>Hier beispielshaft für einige Gesundheitsauswirkungen: HA, HSD, Leseverständnis.</a:t>
             </a:r>
           </a:p>
         </p:txBody>
@@ -3652,7 +3599,12 @@
             <p:ph type="title"/>
           </p:nvPr>
         </p:nvSpPr>
-        <p:spPr/>
+        <p:spPr>
+          <a:xfrm>
+            <a:off x="457201" y="204787"/>
+            <a:ext cx="3008313" cy="871538"/>
+          </a:xfrm>
+        </p:spPr>
         <p:txBody>
           <a:bodyPr/>
           <a:lstStyle/>
@@ -3662,19 +3614,19 @@
             </a:pPr>
             <a:r>
               <a:rPr/>
-              <a:t>Gesundheitsauswirkungen für verschiedene Lärmquellen berechnen</a:t>
-            </a:r>
-          </a:p>
-        </p:txBody>
-      </p:sp>
-      <p:sp>
-        <p:nvSpPr>
-          <p:cNvPr id="3" name="Content Placeholder 2"/>
-          <p:cNvSpPr>
-            <a:spLocks noGrp="1"/>
-          </p:cNvSpPr>
-          <p:nvPr>
-            <p:ph idx="1"/>
+              <a:t>Visualisierungen</a:t>
+            </a:r>
+          </a:p>
+        </p:txBody>
+      </p:sp>
+      <p:sp>
+        <p:nvSpPr>
+          <p:cNvPr id="4" name="Text Placeholder 3"/>
+          <p:cNvSpPr>
+            <a:spLocks noGrp="1"/>
+          </p:cNvSpPr>
+          <p:nvPr>
+            <p:ph idx="2" sz="half" type="body"/>
           </p:nvPr>
         </p:nvSpPr>
         <p:spPr/>
@@ -3687,11 +3639,41 @@
             </a:pPr>
             <a:r>
               <a:rPr/>
-              <a:t>Hier beispielshaft für einige Gesundheitsauswirkungen: HA, HSD, Leseverständnis.</a:t>
-            </a:r>
-          </a:p>
-        </p:txBody>
-      </p:sp>
+              <a:t>Lärmbelastung in Hessen nach Kreisen</a:t>
+            </a:r>
+          </a:p>
+        </p:txBody>
+      </p:sp>
+      <p:pic>
+        <p:nvPicPr>
+          <p:cNvPr descr="healthiar_hessen_files/figure-pptx/plot-exposure-hessen-1.png" id="0" name="Picture 1"/>
+          <p:cNvPicPr>
+            <a:picLocks noGrp="1" noChangeAspect="1"/>
+          </p:cNvPicPr>
+          <p:nvPr/>
+        </p:nvPicPr>
+        <p:blipFill>
+          <a:blip r:embed="rId2"/>
+          <a:stretch>
+            <a:fillRect/>
+          </a:stretch>
+        </p:blipFill>
+        <p:spPr bwMode="auto">
+          <a:xfrm>
+            <a:off x="3568700" y="1117600"/>
+            <a:ext cx="5105400" cy="2552700"/>
+          </a:xfrm>
+          <a:prstGeom prst="rect">
+            <a:avLst/>
+          </a:prstGeom>
+          <a:noFill/>
+          <a:ln w="9525">
+            <a:noFill/>
+            <a:headEnd/>
+            <a:tailEnd/>
+          </a:ln>
+        </p:spPr>
+      </p:pic>
     </p:spTree>
   </p:cSld>
 </p:sld>
@@ -3724,12 +3706,7 @@
             <p:ph type="title"/>
           </p:nvPr>
         </p:nvSpPr>
-        <p:spPr>
-          <a:xfrm>
-            <a:off x="457201" y="204787"/>
-            <a:ext cx="3008313" cy="871538"/>
-          </a:xfrm>
-        </p:spPr>
+        <p:spPr/>
         <p:txBody>
           <a:bodyPr/>
           <a:lstStyle/>
@@ -3739,39 +3716,14 @@
             </a:pPr>
             <a:r>
               <a:rPr/>
-              <a:t>Visualisierungen</a:t>
-            </a:r>
-          </a:p>
-        </p:txBody>
-      </p:sp>
-      <p:sp>
-        <p:nvSpPr>
-          <p:cNvPr id="4" name="Text Placeholder 3"/>
-          <p:cNvSpPr>
-            <a:spLocks noGrp="1"/>
-          </p:cNvSpPr>
-          <p:nvPr>
-            <p:ph idx="2" sz="half" type="body"/>
-          </p:nvPr>
-        </p:nvSpPr>
-        <p:spPr/>
-        <p:txBody>
-          <a:bodyPr/>
-          <a:lstStyle/>
-          <a:p>
-            <a:pPr lvl="0" indent="0" marL="0">
-              <a:buNone/>
-            </a:pPr>
-            <a:r>
-              <a:rPr/>
-              <a:t>Lärmbelastung in Hessen nach Kreisen</a:t>
+              <a:t>Gesundheitsauswirkungen im Kreis Groß-Gerau</a:t>
             </a:r>
           </a:p>
         </p:txBody>
       </p:sp>
       <p:pic>
         <p:nvPicPr>
-          <p:cNvPr descr="healthiar_hessen_files/figure-pptx/plot-exposure-hessen-1.png" id="0" name="Picture 1"/>
+          <p:cNvPr descr="healthiar_hessen_files/figure-pptx/plot-exposure-kreis-gg-1.png" id="0" name="Picture 1"/>
           <p:cNvPicPr>
             <a:picLocks noGrp="1" noChangeAspect="1"/>
           </p:cNvPicPr>
@@ -3785,8 +3737,8 @@
         </p:blipFill>
         <p:spPr bwMode="auto">
           <a:xfrm>
-            <a:off x="3568700" y="1117600"/>
-            <a:ext cx="5105400" cy="2552700"/>
+            <a:off x="1181100" y="1193800"/>
+            <a:ext cx="6781800" cy="3390900"/>
           </a:xfrm>
           <a:prstGeom prst="rect">
             <a:avLst/>

--- a/healthiar_hessen.pptx
+++ b/healthiar_hessen.pptx
@@ -14,6 +14,7 @@
     <p:sldId id="262" r:id="rId8"/>
     <p:sldId id="263" r:id="rId9"/>
     <p:sldId id="264" r:id="rId10"/>
+    <p:sldId id="265" r:id="rId11"/>
   </p:sldIdLst>
   <p:sldSz cx="9144000" cy="5143500" type="screen16x9"/>
   <p:notesSz cx="6858000" cy="9144000"/>
@@ -3165,6 +3166,59 @@
 </p:sld>
 </file>
 
+<file path=ppt/slides/slide10.xml><?xml version="1.0" encoding="utf-8"?>
+<p:sld xmlns:a="http://schemas.openxmlformats.org/drawingml/2006/main" xmlns:r="http://schemas.openxmlformats.org/officeDocument/2006/relationships" xmlns:p="http://schemas.openxmlformats.org/presentationml/2006/main">
+  <p:cSld>
+    <p:spTree>
+      <p:nvGrpSpPr>
+        <p:cNvPr id="1" name=""/>
+        <p:cNvGrpSpPr/>
+        <p:nvPr/>
+      </p:nvGrpSpPr>
+      <p:grpSpPr>
+        <a:xfrm>
+          <a:off x="0" y="0"/>
+          <a:ext cx="0" cy="0"/>
+          <a:chOff x="0" y="0"/>
+          <a:chExt cx="0" cy="0"/>
+        </a:xfrm>
+      </p:grpSpPr>
+      <p:sp>
+        <p:nvSpPr>
+          <p:cNvPr id="3" name="Content Placeholder 2"/>
+          <p:cNvSpPr>
+            <a:spLocks noGrp="1"/>
+          </p:cNvSpPr>
+          <p:nvPr>
+            <p:ph idx="1"/>
+          </p:nvPr>
+        </p:nvSpPr>
+        <p:spPr/>
+        <p:txBody>
+          <a:bodyPr/>
+          <a:lstStyle/>
+          <a:p>
+            <a:pPr lvl="0" indent="0">
+              <a:buNone/>
+            </a:pPr>
+            <a:r>
+              <a:rPr>
+                <a:latin typeface="Courier"/>
+              </a:rPr>
+              <a:t># A tibble: 2 × 2
+  outcome                  DALY
+  &lt;chr&gt;                   &lt;dbl&gt;
+1 High noise annoyance   21310.
+2 High sleep disturbance  5083.</a:t>
+            </a:r>
+          </a:p>
+        </p:txBody>
+      </p:sp>
+    </p:spTree>
+  </p:cSld>
+</p:sld>
+</file>
+
 <file path=ppt/slides/slide2.xml><?xml version="1.0" encoding="utf-8"?>
 <p:sld xmlns:a="http://schemas.openxmlformats.org/drawingml/2006/main" xmlns:r="http://schemas.openxmlformats.org/officeDocument/2006/relationships" xmlns:p="http://schemas.openxmlformats.org/presentationml/2006/main">
   <p:cSld>
@@ -3346,7 +3400,7 @@
             </a:pPr>
             <a:r>
               <a:rPr/>
-              <a:t>Expositionsdaten aufbereiten</a:t>
+              <a:t>Expositions- und Gemeindedaten zusammenführen</a:t>
             </a:r>
           </a:p>
         </p:txBody>
@@ -3371,7 +3425,7 @@
             </a:pPr>
             <a:r>
               <a:rPr/>
-              <a:t>Möglichst alle Daten sollen im long-format verfügbare sein.</a:t>
+              <a:t>Hier gibts eine breite Tabelle, sollte später noch mehr Richtung saubere Datenbank gepflegt werden.</a:t>
             </a:r>
           </a:p>
         </p:txBody>
@@ -3480,7 +3534,12 @@
             <p:ph type="title"/>
           </p:nvPr>
         </p:nvSpPr>
-        <p:spPr/>
+        <p:spPr>
+          <a:xfrm>
+            <a:off x="457201" y="204787"/>
+            <a:ext cx="3008313" cy="871538"/>
+          </a:xfrm>
+        </p:spPr>
         <p:txBody>
           <a:bodyPr/>
           <a:lstStyle/>
@@ -3495,6 +3554,2746 @@
           </a:p>
         </p:txBody>
       </p:sp>
+      <p:sp>
+        <p:nvSpPr>
+          <p:cNvPr id="4" name="Text Placeholder 3"/>
+          <p:cNvSpPr>
+            <a:spLocks noGrp="1"/>
+          </p:cNvSpPr>
+          <p:nvPr>
+            <p:ph idx="2" sz="half" type="body"/>
+          </p:nvPr>
+        </p:nvSpPr>
+        <p:spPr/>
+        <p:txBody>
+          <a:bodyPr/>
+          <a:lstStyle/>
+          <a:p>
+            <a:pPr lvl="0" indent="0" marL="0">
+              <a:buNone/>
+            </a:pPr>
+            <a:r>
+              <a:rPr/>
+              <a:t>Um die Umweltbedingte Krankheitslast zu berechnen, braucht healthiar ein dataframe mit expositionen und ERF zusammen. Das Zusammenführen geschieht hier:</a:t>
+            </a:r>
+          </a:p>
+          <a:p>
+            <a:pPr lvl="0" indent="0" marL="0">
+              <a:buNone/>
+            </a:pPr>
+            <a:r>
+              <a:rPr/>
+              <a:t>Die zusammengeführten Daten haben diese Statistik:</a:t>
+            </a:r>
+          </a:p>
+        </p:txBody>
+      </p:sp>
+      <p:graphicFrame>
+        <p:nvGraphicFramePr>
+          <p:cNvPr id="6" name="Content Placeholder 5"/>
+          <p:cNvGraphicFramePr>
+            <a:graphicFrameLocks noGrp="1"/>
+          </p:cNvGraphicFramePr>
+          <p:nvPr>
+            <p:ph idx="1"/>
+          </p:nvPr>
+        </p:nvGraphicFramePr>
+        <p:xfrm>
+          <a:off x="3568700" y="203200"/>
+          <a:ext cx="5105400" cy="4381500"/>
+        </p:xfrm>
+        <a:graphic>
+          <a:graphicData uri="http://schemas.openxmlformats.org/drawingml/2006/table">
+            <a:tbl>
+              <a:tblPr firstRow="1" bandRow="1">
+                <a:tableStyleId>{5C22544A-7EE6-4342-B048-85BDC9FD1C3A}</a:tableStyleId>
+              </a:tblPr>
+              <a:tblGrid>
+                <a:gridCol w="495300"/>
+                <a:gridCol w="660400"/>
+                <a:gridCol w="990600"/>
+                <a:gridCol w="1257300"/>
+                <a:gridCol w="1155700"/>
+                <a:gridCol w="546100"/>
+              </a:tblGrid>
+              <a:tr h="0">
+                <a:tc>
+                  <a:txBody>
+                    <a:bodyPr/>
+                    <a:lstStyle/>
+                    <a:p>
+                      <a:pPr lvl="0" indent="0" marL="0" algn="l">
+                        <a:buNone/>
+                      </a:pPr>
+                      <a:r>
+                        <a:rPr/>
+                        <a:t>source</a:t>
+                      </a:r>
+                    </a:p>
+                  </a:txBody>
+                  <a:tcPr/>
+                </a:tc>
+                <a:tc>
+                  <a:txBody>
+                    <a:bodyPr/>
+                    <a:lstStyle/>
+                    <a:p>
+                      <a:pPr lvl="0" indent="0" marL="0" algn="l">
+                        <a:buNone/>
+                      </a:pPr>
+                      <a:r>
+                        <a:rPr/>
+                        <a:t>datenquelle</a:t>
+                      </a:r>
+                    </a:p>
+                  </a:txBody>
+                  <a:tcPr/>
+                </a:tc>
+                <a:tc>
+                  <a:txBody>
+                    <a:bodyPr/>
+                    <a:lstStyle/>
+                    <a:p>
+                      <a:pPr lvl="0" indent="0" marL="0" algn="l">
+                        <a:buNone/>
+                      </a:pPr>
+                      <a:r>
+                        <a:rPr/>
+                        <a:t>kartierungsumfang</a:t>
+                      </a:r>
+                    </a:p>
+                  </a:txBody>
+                  <a:tcPr/>
+                </a:tc>
+                <a:tc>
+                  <a:txBody>
+                    <a:bodyPr/>
+                    <a:lstStyle/>
+                    <a:p>
+                      <a:pPr lvl="0" indent="0" marL="0" algn="l">
+                        <a:buNone/>
+                      </a:pPr>
+                      <a:r>
+                        <a:rPr/>
+                        <a:t>outcome</a:t>
+                      </a:r>
+                    </a:p>
+                  </a:txBody>
+                  <a:tcPr/>
+                </a:tc>
+                <a:tc>
+                  <a:txBody>
+                    <a:bodyPr/>
+                    <a:lstStyle/>
+                    <a:p>
+                      <a:pPr lvl="0" indent="0" marL="0" algn="r">
+                        <a:buNone/>
+                      </a:pPr>
+                      <a:r>
+                        <a:rPr/>
+                        <a:t>AnzBelastetenklassen</a:t>
+                      </a:r>
+                    </a:p>
+                  </a:txBody>
+                  <a:tcPr/>
+                </a:tc>
+                <a:tc>
+                  <a:txBody>
+                    <a:bodyPr/>
+                    <a:lstStyle/>
+                    <a:p>
+                      <a:pPr lvl="0" indent="0" marL="0" algn="r">
+                        <a:buNone/>
+                      </a:pPr>
+                      <a:r>
+                        <a:rPr/>
+                        <a:t>Belastete</a:t>
+                      </a:r>
+                    </a:p>
+                  </a:txBody>
+                  <a:tcPr/>
+                </a:tc>
+              </a:tr>
+              <a:tr h="0">
+                <a:tc>
+                  <a:txBody>
+                    <a:bodyPr/>
+                    <a:lstStyle/>
+                    <a:p>
+                      <a:pPr lvl="0" indent="0" marL="0" algn="l">
+                        <a:buNone/>
+                      </a:pPr>
+                      <a:r>
+                        <a:rPr/>
+                        <a:t>air</a:t>
+                      </a:r>
+                    </a:p>
+                  </a:txBody>
+                </a:tc>
+                <a:tc>
+                  <a:txBody>
+                    <a:bodyPr/>
+                    <a:lstStyle/>
+                    <a:p>
+                      <a:pPr lvl="0" indent="0" marL="0" algn="l">
+                        <a:buNone/>
+                      </a:pPr>
+                      <a:r>
+                        <a:rPr/>
+                        <a:t>Bundesland</a:t>
+                      </a:r>
+                    </a:p>
+                  </a:txBody>
+                </a:tc>
+                <a:tc>
+                  <a:txBody>
+                    <a:bodyPr/>
+                    <a:lstStyle/>
+                    <a:p>
+                      <a:pPr lvl="0" indent="0" marL="0" algn="l">
+                        <a:buNone/>
+                      </a:pPr>
+                      <a:r>
+                        <a:rPr/>
+                        <a:t>major</a:t>
+                      </a:r>
+                    </a:p>
+                  </a:txBody>
+                </a:tc>
+                <a:tc>
+                  <a:txBody>
+                    <a:bodyPr/>
+                    <a:lstStyle/>
+                    <a:p>
+                      <a:pPr lvl="0" indent="0" marL="0" algn="l">
+                        <a:buNone/>
+                      </a:pPr>
+                      <a:r>
+                        <a:rPr/>
+                        <a:t>All-cause mortality</a:t>
+                      </a:r>
+                    </a:p>
+                  </a:txBody>
+                </a:tc>
+                <a:tc>
+                  <a:txBody>
+                    <a:bodyPr/>
+                    <a:lstStyle/>
+                    <a:p>
+                      <a:pPr lvl="0" indent="0" marL="0" algn="r">
+                        <a:buNone/>
+                      </a:pPr>
+                      <a:r>
+                        <a:rPr/>
+                        <a:t>215</a:t>
+                      </a:r>
+                    </a:p>
+                  </a:txBody>
+                </a:tc>
+                <a:tc>
+                  <a:txBody>
+                    <a:bodyPr/>
+                    <a:lstStyle/>
+                    <a:p>
+                      <a:pPr lvl="0" indent="0" marL="0" algn="r">
+                        <a:buNone/>
+                      </a:pPr>
+                      <a:r>
+                        <a:rPr/>
+                        <a:t>381247</a:t>
+                      </a:r>
+                    </a:p>
+                  </a:txBody>
+                </a:tc>
+              </a:tr>
+              <a:tr h="0">
+                <a:tc>
+                  <a:txBody>
+                    <a:bodyPr/>
+                    <a:lstStyle/>
+                    <a:p>
+                      <a:pPr lvl="0" indent="0" marL="0" algn="l">
+                        <a:buNone/>
+                      </a:pPr>
+                      <a:r>
+                        <a:rPr/>
+                        <a:t>air</a:t>
+                      </a:r>
+                    </a:p>
+                  </a:txBody>
+                </a:tc>
+                <a:tc>
+                  <a:txBody>
+                    <a:bodyPr/>
+                    <a:lstStyle/>
+                    <a:p>
+                      <a:pPr lvl="0" indent="0" marL="0" algn="l">
+                        <a:buNone/>
+                      </a:pPr>
+                      <a:r>
+                        <a:rPr/>
+                        <a:t>Bundesland</a:t>
+                      </a:r>
+                    </a:p>
+                  </a:txBody>
+                </a:tc>
+                <a:tc>
+                  <a:txBody>
+                    <a:bodyPr/>
+                    <a:lstStyle/>
+                    <a:p>
+                      <a:pPr lvl="0" indent="0" marL="0" algn="l">
+                        <a:buNone/>
+                      </a:pPr>
+                      <a:r>
+                        <a:rPr/>
+                        <a:t>major</a:t>
+                      </a:r>
+                    </a:p>
+                  </a:txBody>
+                </a:tc>
+                <a:tc>
+                  <a:txBody>
+                    <a:bodyPr/>
+                    <a:lstStyle/>
+                    <a:p>
+                      <a:pPr lvl="0" indent="0" marL="0" algn="l">
+                        <a:buNone/>
+                      </a:pPr>
+                      <a:r>
+                        <a:rPr/>
+                        <a:t>Cardiovascular disease</a:t>
+                      </a:r>
+                    </a:p>
+                  </a:txBody>
+                </a:tc>
+                <a:tc>
+                  <a:txBody>
+                    <a:bodyPr/>
+                    <a:lstStyle/>
+                    <a:p>
+                      <a:pPr lvl="0" indent="0" marL="0" algn="r">
+                        <a:buNone/>
+                      </a:pPr>
+                      <a:r>
+                        <a:rPr/>
+                        <a:t>215</a:t>
+                      </a:r>
+                    </a:p>
+                  </a:txBody>
+                </a:tc>
+                <a:tc>
+                  <a:txBody>
+                    <a:bodyPr/>
+                    <a:lstStyle/>
+                    <a:p>
+                      <a:pPr lvl="0" indent="0" marL="0" algn="r">
+                        <a:buNone/>
+                      </a:pPr>
+                      <a:r>
+                        <a:rPr/>
+                        <a:t>381247</a:t>
+                      </a:r>
+                    </a:p>
+                  </a:txBody>
+                </a:tc>
+              </a:tr>
+              <a:tr h="0">
+                <a:tc>
+                  <a:txBody>
+                    <a:bodyPr/>
+                    <a:lstStyle/>
+                    <a:p>
+                      <a:pPr lvl="0" indent="0" marL="0" algn="l">
+                        <a:buNone/>
+                      </a:pPr>
+                      <a:r>
+                        <a:rPr/>
+                        <a:t>air</a:t>
+                      </a:r>
+                    </a:p>
+                  </a:txBody>
+                </a:tc>
+                <a:tc>
+                  <a:txBody>
+                    <a:bodyPr/>
+                    <a:lstStyle/>
+                    <a:p>
+                      <a:pPr lvl="0" indent="0" marL="0" algn="l">
+                        <a:buNone/>
+                      </a:pPr>
+                      <a:r>
+                        <a:rPr/>
+                        <a:t>Bundesland</a:t>
+                      </a:r>
+                    </a:p>
+                  </a:txBody>
+                </a:tc>
+                <a:tc>
+                  <a:txBody>
+                    <a:bodyPr/>
+                    <a:lstStyle/>
+                    <a:p>
+                      <a:pPr lvl="0" indent="0" marL="0" algn="l">
+                        <a:buNone/>
+                      </a:pPr>
+                      <a:r>
+                        <a:rPr/>
+                        <a:t>major</a:t>
+                      </a:r>
+                    </a:p>
+                  </a:txBody>
+                </a:tc>
+                <a:tc>
+                  <a:txBody>
+                    <a:bodyPr/>
+                    <a:lstStyle/>
+                    <a:p>
+                      <a:pPr lvl="0" indent="0" marL="0" algn="l">
+                        <a:buNone/>
+                      </a:pPr>
+                      <a:r>
+                        <a:rPr/>
+                        <a:t>Diabetes</a:t>
+                      </a:r>
+                    </a:p>
+                  </a:txBody>
+                </a:tc>
+                <a:tc>
+                  <a:txBody>
+                    <a:bodyPr/>
+                    <a:lstStyle/>
+                    <a:p>
+                      <a:pPr lvl="0" indent="0" marL="0" algn="r">
+                        <a:buNone/>
+                      </a:pPr>
+                      <a:r>
+                        <a:rPr/>
+                        <a:t>215</a:t>
+                      </a:r>
+                    </a:p>
+                  </a:txBody>
+                </a:tc>
+                <a:tc>
+                  <a:txBody>
+                    <a:bodyPr/>
+                    <a:lstStyle/>
+                    <a:p>
+                      <a:pPr lvl="0" indent="0" marL="0" algn="r">
+                        <a:buNone/>
+                      </a:pPr>
+                      <a:r>
+                        <a:rPr/>
+                        <a:t>381247</a:t>
+                      </a:r>
+                    </a:p>
+                  </a:txBody>
+                </a:tc>
+              </a:tr>
+              <a:tr h="0">
+                <a:tc>
+                  <a:txBody>
+                    <a:bodyPr/>
+                    <a:lstStyle/>
+                    <a:p>
+                      <a:pPr lvl="0" indent="0" marL="0" algn="l">
+                        <a:buNone/>
+                      </a:pPr>
+                      <a:r>
+                        <a:rPr/>
+                        <a:t>air</a:t>
+                      </a:r>
+                    </a:p>
+                  </a:txBody>
+                </a:tc>
+                <a:tc>
+                  <a:txBody>
+                    <a:bodyPr/>
+                    <a:lstStyle/>
+                    <a:p>
+                      <a:pPr lvl="0" indent="0" marL="0" algn="l">
+                        <a:buNone/>
+                      </a:pPr>
+                      <a:r>
+                        <a:rPr/>
+                        <a:t>Bundesland</a:t>
+                      </a:r>
+                    </a:p>
+                  </a:txBody>
+                </a:tc>
+                <a:tc>
+                  <a:txBody>
+                    <a:bodyPr/>
+                    <a:lstStyle/>
+                    <a:p>
+                      <a:pPr lvl="0" indent="0" marL="0" algn="l">
+                        <a:buNone/>
+                      </a:pPr>
+                      <a:r>
+                        <a:rPr/>
+                        <a:t>major</a:t>
+                      </a:r>
+                    </a:p>
+                  </a:txBody>
+                </a:tc>
+                <a:tc>
+                  <a:txBody>
+                    <a:bodyPr/>
+                    <a:lstStyle/>
+                    <a:p>
+                      <a:pPr lvl="0" indent="0" marL="0" algn="l">
+                        <a:buNone/>
+                      </a:pPr>
+                      <a:r>
+                        <a:rPr/>
+                        <a:t>High noise annoyance</a:t>
+                      </a:r>
+                    </a:p>
+                  </a:txBody>
+                </a:tc>
+                <a:tc>
+                  <a:txBody>
+                    <a:bodyPr/>
+                    <a:lstStyle/>
+                    <a:p>
+                      <a:pPr lvl="0" indent="0" marL="0" algn="r">
+                        <a:buNone/>
+                      </a:pPr>
+                      <a:r>
+                        <a:rPr/>
+                        <a:t>215</a:t>
+                      </a:r>
+                    </a:p>
+                  </a:txBody>
+                </a:tc>
+                <a:tc>
+                  <a:txBody>
+                    <a:bodyPr/>
+                    <a:lstStyle/>
+                    <a:p>
+                      <a:pPr lvl="0" indent="0" marL="0" algn="r">
+                        <a:buNone/>
+                      </a:pPr>
+                      <a:r>
+                        <a:rPr/>
+                        <a:t>381247</a:t>
+                      </a:r>
+                    </a:p>
+                  </a:txBody>
+                </a:tc>
+              </a:tr>
+              <a:tr h="0">
+                <a:tc>
+                  <a:txBody>
+                    <a:bodyPr/>
+                    <a:lstStyle/>
+                    <a:p>
+                      <a:pPr lvl="0" indent="0" marL="0" algn="l">
+                        <a:buNone/>
+                      </a:pPr>
+                      <a:r>
+                        <a:rPr/>
+                        <a:t>air</a:t>
+                      </a:r>
+                    </a:p>
+                  </a:txBody>
+                </a:tc>
+                <a:tc>
+                  <a:txBody>
+                    <a:bodyPr/>
+                    <a:lstStyle/>
+                    <a:p>
+                      <a:pPr lvl="0" indent="0" marL="0" algn="l">
+                        <a:buNone/>
+                      </a:pPr>
+                      <a:r>
+                        <a:rPr/>
+                        <a:t>Bundesland</a:t>
+                      </a:r>
+                    </a:p>
+                  </a:txBody>
+                </a:tc>
+                <a:tc>
+                  <a:txBody>
+                    <a:bodyPr/>
+                    <a:lstStyle/>
+                    <a:p>
+                      <a:pPr lvl="0" indent="0" marL="0" algn="l">
+                        <a:buNone/>
+                      </a:pPr>
+                      <a:r>
+                        <a:rPr/>
+                        <a:t>major</a:t>
+                      </a:r>
+                    </a:p>
+                  </a:txBody>
+                </a:tc>
+                <a:tc>
+                  <a:txBody>
+                    <a:bodyPr/>
+                    <a:lstStyle/>
+                    <a:p>
+                      <a:pPr lvl="0" indent="0" marL="0" algn="l">
+                        <a:buNone/>
+                      </a:pPr>
+                      <a:r>
+                        <a:rPr/>
+                        <a:t>High sleep disturbance</a:t>
+                      </a:r>
+                    </a:p>
+                  </a:txBody>
+                </a:tc>
+                <a:tc>
+                  <a:txBody>
+                    <a:bodyPr/>
+                    <a:lstStyle/>
+                    <a:p>
+                      <a:pPr lvl="0" indent="0" marL="0" algn="r">
+                        <a:buNone/>
+                      </a:pPr>
+                      <a:r>
+                        <a:rPr/>
+                        <a:t>215</a:t>
+                      </a:r>
+                    </a:p>
+                  </a:txBody>
+                </a:tc>
+                <a:tc>
+                  <a:txBody>
+                    <a:bodyPr/>
+                    <a:lstStyle/>
+                    <a:p>
+                      <a:pPr lvl="0" indent="0" marL="0" algn="r">
+                        <a:buNone/>
+                      </a:pPr>
+                      <a:r>
+                        <a:rPr/>
+                        <a:t>82638</a:t>
+                      </a:r>
+                    </a:p>
+                  </a:txBody>
+                </a:tc>
+              </a:tr>
+              <a:tr h="0">
+                <a:tc>
+                  <a:txBody>
+                    <a:bodyPr/>
+                    <a:lstStyle/>
+                    <a:p>
+                      <a:pPr lvl="0" indent="0" marL="0" algn="l">
+                        <a:buNone/>
+                      </a:pPr>
+                      <a:r>
+                        <a:rPr/>
+                        <a:t>air</a:t>
+                      </a:r>
+                    </a:p>
+                  </a:txBody>
+                </a:tc>
+                <a:tc>
+                  <a:txBody>
+                    <a:bodyPr/>
+                    <a:lstStyle/>
+                    <a:p>
+                      <a:pPr lvl="0" indent="0" marL="0" algn="l">
+                        <a:buNone/>
+                      </a:pPr>
+                      <a:r>
+                        <a:rPr/>
+                        <a:t>Bundesland</a:t>
+                      </a:r>
+                    </a:p>
+                  </a:txBody>
+                </a:tc>
+                <a:tc>
+                  <a:txBody>
+                    <a:bodyPr/>
+                    <a:lstStyle/>
+                    <a:p>
+                      <a:pPr lvl="0" indent="0" marL="0" algn="l">
+                        <a:buNone/>
+                      </a:pPr>
+                      <a:r>
+                        <a:rPr/>
+                        <a:t>major</a:t>
+                      </a:r>
+                    </a:p>
+                  </a:txBody>
+                </a:tc>
+                <a:tc>
+                  <a:txBody>
+                    <a:bodyPr/>
+                    <a:lstStyle/>
+                    <a:p>
+                      <a:pPr lvl="0" indent="0" marL="0" algn="l">
+                        <a:buNone/>
+                      </a:pPr>
+                      <a:r>
+                        <a:rPr/>
+                        <a:t>Reading Comprehension</a:t>
+                      </a:r>
+                    </a:p>
+                  </a:txBody>
+                </a:tc>
+                <a:tc>
+                  <a:txBody>
+                    <a:bodyPr/>
+                    <a:lstStyle/>
+                    <a:p>
+                      <a:pPr lvl="0" indent="0" marL="0" algn="r">
+                        <a:buNone/>
+                      </a:pPr>
+                      <a:r>
+                        <a:rPr/>
+                        <a:t>215</a:t>
+                      </a:r>
+                    </a:p>
+                  </a:txBody>
+                </a:tc>
+                <a:tc>
+                  <a:txBody>
+                    <a:bodyPr/>
+                    <a:lstStyle/>
+                    <a:p>
+                      <a:pPr lvl="0" indent="0" marL="0" algn="r">
+                        <a:buNone/>
+                      </a:pPr>
+                      <a:r>
+                        <a:rPr/>
+                        <a:t>381247</a:t>
+                      </a:r>
+                    </a:p>
+                  </a:txBody>
+                </a:tc>
+              </a:tr>
+              <a:tr h="0">
+                <a:tc>
+                  <a:txBody>
+                    <a:bodyPr/>
+                    <a:lstStyle/>
+                    <a:p>
+                      <a:pPr lvl="0" indent="0" marL="0" algn="l">
+                        <a:buNone/>
+                      </a:pPr>
+                      <a:r>
+                        <a:rPr/>
+                        <a:t>industry</a:t>
+                      </a:r>
+                    </a:p>
+                  </a:txBody>
+                </a:tc>
+                <a:tc>
+                  <a:txBody>
+                    <a:bodyPr/>
+                    <a:lstStyle/>
+                    <a:p>
+                      <a:pPr lvl="0" indent="0" marL="0" algn="l">
+                        <a:buNone/>
+                      </a:pPr>
+                      <a:r>
+                        <a:rPr/>
+                        <a:t>Bundesland</a:t>
+                      </a:r>
+                    </a:p>
+                  </a:txBody>
+                </a:tc>
+                <a:tc>
+                  <a:txBody>
+                    <a:bodyPr/>
+                    <a:lstStyle/>
+                    <a:p>
+                      <a:pPr lvl="0" indent="0" marL="0" algn="l">
+                        <a:buNone/>
+                      </a:pPr>
+                      <a:r>
+                        <a:rPr/>
+                        <a:t>major</a:t>
+                      </a:r>
+                    </a:p>
+                  </a:txBody>
+                </a:tc>
+                <a:tc>
+                  <a:txBody>
+                    <a:bodyPr/>
+                    <a:lstStyle/>
+                    <a:p>
+                      <a:pPr lvl="0" indent="0" marL="0" algn="l">
+                        <a:buNone/>
+                      </a:pPr>
+                      <a:r>
+                        <a:rPr/>
+                        <a:t>High noise annoyance</a:t>
+                      </a:r>
+                    </a:p>
+                  </a:txBody>
+                </a:tc>
+                <a:tc>
+                  <a:txBody>
+                    <a:bodyPr/>
+                    <a:lstStyle/>
+                    <a:p>
+                      <a:pPr lvl="0" indent="0" marL="0" algn="r">
+                        <a:buNone/>
+                      </a:pPr>
+                      <a:r>
+                        <a:rPr/>
+                        <a:t>30</a:t>
+                      </a:r>
+                    </a:p>
+                  </a:txBody>
+                </a:tc>
+                <a:tc>
+                  <a:txBody>
+                    <a:bodyPr/>
+                    <a:lstStyle/>
+                    <a:p>
+                      <a:pPr lvl="0" indent="0" marL="0" algn="r">
+                        <a:buNone/>
+                      </a:pPr>
+                      <a:r>
+                        <a:rPr/>
+                        <a:t>6336</a:t>
+                      </a:r>
+                    </a:p>
+                  </a:txBody>
+                </a:tc>
+              </a:tr>
+              <a:tr h="0">
+                <a:tc>
+                  <a:txBody>
+                    <a:bodyPr/>
+                    <a:lstStyle/>
+                    <a:p>
+                      <a:pPr lvl="0" indent="0" marL="0" algn="l">
+                        <a:buNone/>
+                      </a:pPr>
+                      <a:r>
+                        <a:rPr/>
+                        <a:t>industry</a:t>
+                      </a:r>
+                    </a:p>
+                  </a:txBody>
+                </a:tc>
+                <a:tc>
+                  <a:txBody>
+                    <a:bodyPr/>
+                    <a:lstStyle/>
+                    <a:p>
+                      <a:pPr lvl="0" indent="0" marL="0" algn="l">
+                        <a:buNone/>
+                      </a:pPr>
+                      <a:r>
+                        <a:rPr/>
+                        <a:t>Bundesland</a:t>
+                      </a:r>
+                    </a:p>
+                  </a:txBody>
+                </a:tc>
+                <a:tc>
+                  <a:txBody>
+                    <a:bodyPr/>
+                    <a:lstStyle/>
+                    <a:p>
+                      <a:pPr lvl="0" indent="0" marL="0" algn="l">
+                        <a:buNone/>
+                      </a:pPr>
+                      <a:r>
+                        <a:rPr/>
+                        <a:t>major</a:t>
+                      </a:r>
+                    </a:p>
+                  </a:txBody>
+                </a:tc>
+                <a:tc>
+                  <a:txBody>
+                    <a:bodyPr/>
+                    <a:lstStyle/>
+                    <a:p>
+                      <a:pPr lvl="0" indent="0" marL="0" algn="l">
+                        <a:buNone/>
+                      </a:pPr>
+                      <a:r>
+                        <a:rPr/>
+                        <a:t>High sleep disturbance</a:t>
+                      </a:r>
+                    </a:p>
+                  </a:txBody>
+                </a:tc>
+                <a:tc>
+                  <a:txBody>
+                    <a:bodyPr/>
+                    <a:lstStyle/>
+                    <a:p>
+                      <a:pPr lvl="0" indent="0" marL="0" algn="r">
+                        <a:buNone/>
+                      </a:pPr>
+                      <a:r>
+                        <a:rPr/>
+                        <a:t>30</a:t>
+                      </a:r>
+                    </a:p>
+                  </a:txBody>
+                </a:tc>
+                <a:tc>
+                  <a:txBody>
+                    <a:bodyPr/>
+                    <a:lstStyle/>
+                    <a:p>
+                      <a:pPr lvl="0" indent="0" marL="0" algn="r">
+                        <a:buNone/>
+                      </a:pPr>
+                      <a:r>
+                        <a:rPr/>
+                        <a:t>4806</a:t>
+                      </a:r>
+                    </a:p>
+                  </a:txBody>
+                </a:tc>
+              </a:tr>
+              <a:tr h="0">
+                <a:tc>
+                  <a:txBody>
+                    <a:bodyPr/>
+                    <a:lstStyle/>
+                    <a:p>
+                      <a:pPr lvl="0" indent="0" marL="0" algn="l">
+                        <a:buNone/>
+                      </a:pPr>
+                      <a:r>
+                        <a:rPr/>
+                        <a:t>road</a:t>
+                      </a:r>
+                    </a:p>
+                  </a:txBody>
+                </a:tc>
+                <a:tc>
+                  <a:txBody>
+                    <a:bodyPr/>
+                    <a:lstStyle/>
+                    <a:p>
+                      <a:pPr lvl="0" indent="0" marL="0" algn="l">
+                        <a:buNone/>
+                      </a:pPr>
+                      <a:r>
+                        <a:rPr/>
+                        <a:t>Bundesland</a:t>
+                      </a:r>
+                    </a:p>
+                  </a:txBody>
+                </a:tc>
+                <a:tc>
+                  <a:txBody>
+                    <a:bodyPr/>
+                    <a:lstStyle/>
+                    <a:p>
+                      <a:pPr lvl="0" indent="0" marL="0" algn="l">
+                        <a:buNone/>
+                      </a:pPr>
+                      <a:r>
+                        <a:rPr/>
+                        <a:t>all</a:t>
+                      </a:r>
+                    </a:p>
+                  </a:txBody>
+                </a:tc>
+                <a:tc>
+                  <a:txBody>
+                    <a:bodyPr/>
+                    <a:lstStyle/>
+                    <a:p>
+                      <a:pPr lvl="0" indent="0" marL="0" algn="l">
+                        <a:buNone/>
+                      </a:pPr>
+                      <a:r>
+                        <a:rPr/>
+                        <a:t>All-cause mortality</a:t>
+                      </a:r>
+                    </a:p>
+                  </a:txBody>
+                </a:tc>
+                <a:tc>
+                  <a:txBody>
+                    <a:bodyPr/>
+                    <a:lstStyle/>
+                    <a:p>
+                      <a:pPr lvl="0" indent="0" marL="0" algn="r">
+                        <a:buNone/>
+                      </a:pPr>
+                      <a:r>
+                        <a:rPr/>
+                        <a:t>30</a:t>
+                      </a:r>
+                    </a:p>
+                  </a:txBody>
+                </a:tc>
+                <a:tc>
+                  <a:txBody>
+                    <a:bodyPr/>
+                    <a:lstStyle/>
+                    <a:p>
+                      <a:pPr lvl="0" indent="0" marL="0" algn="r">
+                        <a:buNone/>
+                      </a:pPr>
+                      <a:r>
+                        <a:rPr/>
+                        <a:t>688104</a:t>
+                      </a:r>
+                    </a:p>
+                  </a:txBody>
+                </a:tc>
+              </a:tr>
+              <a:tr h="0">
+                <a:tc>
+                  <a:txBody>
+                    <a:bodyPr/>
+                    <a:lstStyle/>
+                    <a:p>
+                      <a:pPr lvl="0" indent="0" marL="0" algn="l">
+                        <a:buNone/>
+                      </a:pPr>
+                      <a:r>
+                        <a:rPr/>
+                        <a:t>road</a:t>
+                      </a:r>
+                    </a:p>
+                  </a:txBody>
+                </a:tc>
+                <a:tc>
+                  <a:txBody>
+                    <a:bodyPr/>
+                    <a:lstStyle/>
+                    <a:p>
+                      <a:pPr lvl="0" indent="0" marL="0" algn="l">
+                        <a:buNone/>
+                      </a:pPr>
+                      <a:r>
+                        <a:rPr/>
+                        <a:t>Bundesland</a:t>
+                      </a:r>
+                    </a:p>
+                  </a:txBody>
+                </a:tc>
+                <a:tc>
+                  <a:txBody>
+                    <a:bodyPr/>
+                    <a:lstStyle/>
+                    <a:p>
+                      <a:pPr lvl="0" indent="0" marL="0" algn="l">
+                        <a:buNone/>
+                      </a:pPr>
+                      <a:r>
+                        <a:rPr/>
+                        <a:t>all</a:t>
+                      </a:r>
+                    </a:p>
+                  </a:txBody>
+                </a:tc>
+                <a:tc>
+                  <a:txBody>
+                    <a:bodyPr/>
+                    <a:lstStyle/>
+                    <a:p>
+                      <a:pPr lvl="0" indent="0" marL="0" algn="l">
+                        <a:buNone/>
+                      </a:pPr>
+                      <a:r>
+                        <a:rPr/>
+                        <a:t>Cardiovascular disease</a:t>
+                      </a:r>
+                    </a:p>
+                  </a:txBody>
+                </a:tc>
+                <a:tc>
+                  <a:txBody>
+                    <a:bodyPr/>
+                    <a:lstStyle/>
+                    <a:p>
+                      <a:pPr lvl="0" indent="0" marL="0" algn="r">
+                        <a:buNone/>
+                      </a:pPr>
+                      <a:r>
+                        <a:rPr/>
+                        <a:t>30</a:t>
+                      </a:r>
+                    </a:p>
+                  </a:txBody>
+                </a:tc>
+                <a:tc>
+                  <a:txBody>
+                    <a:bodyPr/>
+                    <a:lstStyle/>
+                    <a:p>
+                      <a:pPr lvl="0" indent="0" marL="0" algn="r">
+                        <a:buNone/>
+                      </a:pPr>
+                      <a:r>
+                        <a:rPr/>
+                        <a:t>688104</a:t>
+                      </a:r>
+                    </a:p>
+                  </a:txBody>
+                </a:tc>
+              </a:tr>
+              <a:tr h="0">
+                <a:tc>
+                  <a:txBody>
+                    <a:bodyPr/>
+                    <a:lstStyle/>
+                    <a:p>
+                      <a:pPr lvl="0" indent="0" marL="0" algn="l">
+                        <a:buNone/>
+                      </a:pPr>
+                      <a:r>
+                        <a:rPr/>
+                        <a:t>road</a:t>
+                      </a:r>
+                    </a:p>
+                  </a:txBody>
+                </a:tc>
+                <a:tc>
+                  <a:txBody>
+                    <a:bodyPr/>
+                    <a:lstStyle/>
+                    <a:p>
+                      <a:pPr lvl="0" indent="0" marL="0" algn="l">
+                        <a:buNone/>
+                      </a:pPr>
+                      <a:r>
+                        <a:rPr/>
+                        <a:t>Bundesland</a:t>
+                      </a:r>
+                    </a:p>
+                  </a:txBody>
+                </a:tc>
+                <a:tc>
+                  <a:txBody>
+                    <a:bodyPr/>
+                    <a:lstStyle/>
+                    <a:p>
+                      <a:pPr lvl="0" indent="0" marL="0" algn="l">
+                        <a:buNone/>
+                      </a:pPr>
+                      <a:r>
+                        <a:rPr/>
+                        <a:t>all</a:t>
+                      </a:r>
+                    </a:p>
+                  </a:txBody>
+                </a:tc>
+                <a:tc>
+                  <a:txBody>
+                    <a:bodyPr/>
+                    <a:lstStyle/>
+                    <a:p>
+                      <a:pPr lvl="0" indent="0" marL="0" algn="l">
+                        <a:buNone/>
+                      </a:pPr>
+                      <a:r>
+                        <a:rPr/>
+                        <a:t>Diabetes</a:t>
+                      </a:r>
+                    </a:p>
+                  </a:txBody>
+                </a:tc>
+                <a:tc>
+                  <a:txBody>
+                    <a:bodyPr/>
+                    <a:lstStyle/>
+                    <a:p>
+                      <a:pPr lvl="0" indent="0" marL="0" algn="r">
+                        <a:buNone/>
+                      </a:pPr>
+                      <a:r>
+                        <a:rPr/>
+                        <a:t>30</a:t>
+                      </a:r>
+                    </a:p>
+                  </a:txBody>
+                </a:tc>
+                <a:tc>
+                  <a:txBody>
+                    <a:bodyPr/>
+                    <a:lstStyle/>
+                    <a:p>
+                      <a:pPr lvl="0" indent="0" marL="0" algn="r">
+                        <a:buNone/>
+                      </a:pPr>
+                      <a:r>
+                        <a:rPr/>
+                        <a:t>688104</a:t>
+                      </a:r>
+                    </a:p>
+                  </a:txBody>
+                </a:tc>
+              </a:tr>
+              <a:tr h="0">
+                <a:tc>
+                  <a:txBody>
+                    <a:bodyPr/>
+                    <a:lstStyle/>
+                    <a:p>
+                      <a:pPr lvl="0" indent="0" marL="0" algn="l">
+                        <a:buNone/>
+                      </a:pPr>
+                      <a:r>
+                        <a:rPr/>
+                        <a:t>road</a:t>
+                      </a:r>
+                    </a:p>
+                  </a:txBody>
+                </a:tc>
+                <a:tc>
+                  <a:txBody>
+                    <a:bodyPr/>
+                    <a:lstStyle/>
+                    <a:p>
+                      <a:pPr lvl="0" indent="0" marL="0" algn="l">
+                        <a:buNone/>
+                      </a:pPr>
+                      <a:r>
+                        <a:rPr/>
+                        <a:t>Bundesland</a:t>
+                      </a:r>
+                    </a:p>
+                  </a:txBody>
+                </a:tc>
+                <a:tc>
+                  <a:txBody>
+                    <a:bodyPr/>
+                    <a:lstStyle/>
+                    <a:p>
+                      <a:pPr lvl="0" indent="0" marL="0" algn="l">
+                        <a:buNone/>
+                      </a:pPr>
+                      <a:r>
+                        <a:rPr/>
+                        <a:t>all</a:t>
+                      </a:r>
+                    </a:p>
+                  </a:txBody>
+                </a:tc>
+                <a:tc>
+                  <a:txBody>
+                    <a:bodyPr/>
+                    <a:lstStyle/>
+                    <a:p>
+                      <a:pPr lvl="0" indent="0" marL="0" algn="l">
+                        <a:buNone/>
+                      </a:pPr>
+                      <a:r>
+                        <a:rPr/>
+                        <a:t>High noise annoyance</a:t>
+                      </a:r>
+                    </a:p>
+                  </a:txBody>
+                </a:tc>
+                <a:tc>
+                  <a:txBody>
+                    <a:bodyPr/>
+                    <a:lstStyle/>
+                    <a:p>
+                      <a:pPr lvl="0" indent="0" marL="0" algn="r">
+                        <a:buNone/>
+                      </a:pPr>
+                      <a:r>
+                        <a:rPr/>
+                        <a:t>30</a:t>
+                      </a:r>
+                    </a:p>
+                  </a:txBody>
+                </a:tc>
+                <a:tc>
+                  <a:txBody>
+                    <a:bodyPr/>
+                    <a:lstStyle/>
+                    <a:p>
+                      <a:pPr lvl="0" indent="0" marL="0" algn="r">
+                        <a:buNone/>
+                      </a:pPr>
+                      <a:r>
+                        <a:rPr/>
+                        <a:t>688104</a:t>
+                      </a:r>
+                    </a:p>
+                  </a:txBody>
+                </a:tc>
+              </a:tr>
+              <a:tr h="0">
+                <a:tc>
+                  <a:txBody>
+                    <a:bodyPr/>
+                    <a:lstStyle/>
+                    <a:p>
+                      <a:pPr lvl="0" indent="0" marL="0" algn="l">
+                        <a:buNone/>
+                      </a:pPr>
+                      <a:r>
+                        <a:rPr/>
+                        <a:t>road</a:t>
+                      </a:r>
+                    </a:p>
+                  </a:txBody>
+                </a:tc>
+                <a:tc>
+                  <a:txBody>
+                    <a:bodyPr/>
+                    <a:lstStyle/>
+                    <a:p>
+                      <a:pPr lvl="0" indent="0" marL="0" algn="l">
+                        <a:buNone/>
+                      </a:pPr>
+                      <a:r>
+                        <a:rPr/>
+                        <a:t>Bundesland</a:t>
+                      </a:r>
+                    </a:p>
+                  </a:txBody>
+                </a:tc>
+                <a:tc>
+                  <a:txBody>
+                    <a:bodyPr/>
+                    <a:lstStyle/>
+                    <a:p>
+                      <a:pPr lvl="0" indent="0" marL="0" algn="l">
+                        <a:buNone/>
+                      </a:pPr>
+                      <a:r>
+                        <a:rPr/>
+                        <a:t>all</a:t>
+                      </a:r>
+                    </a:p>
+                  </a:txBody>
+                </a:tc>
+                <a:tc>
+                  <a:txBody>
+                    <a:bodyPr/>
+                    <a:lstStyle/>
+                    <a:p>
+                      <a:pPr lvl="0" indent="0" marL="0" algn="l">
+                        <a:buNone/>
+                      </a:pPr>
+                      <a:r>
+                        <a:rPr/>
+                        <a:t>High sleep disturbance</a:t>
+                      </a:r>
+                    </a:p>
+                  </a:txBody>
+                </a:tc>
+                <a:tc>
+                  <a:txBody>
+                    <a:bodyPr/>
+                    <a:lstStyle/>
+                    <a:p>
+                      <a:pPr lvl="0" indent="0" marL="0" algn="r">
+                        <a:buNone/>
+                      </a:pPr>
+                      <a:r>
+                        <a:rPr/>
+                        <a:t>30</a:t>
+                      </a:r>
+                    </a:p>
+                  </a:txBody>
+                </a:tc>
+                <a:tc>
+                  <a:txBody>
+                    <a:bodyPr/>
+                    <a:lstStyle/>
+                    <a:p>
+                      <a:pPr lvl="0" indent="0" marL="0" algn="r">
+                        <a:buNone/>
+                      </a:pPr>
+                      <a:r>
+                        <a:rPr/>
+                        <a:t>514053</a:t>
+                      </a:r>
+                    </a:p>
+                  </a:txBody>
+                </a:tc>
+              </a:tr>
+              <a:tr h="0">
+                <a:tc>
+                  <a:txBody>
+                    <a:bodyPr/>
+                    <a:lstStyle/>
+                    <a:p>
+                      <a:pPr lvl="0" indent="0" marL="0" algn="l">
+                        <a:buNone/>
+                      </a:pPr>
+                      <a:r>
+                        <a:rPr/>
+                        <a:t>road</a:t>
+                      </a:r>
+                    </a:p>
+                  </a:txBody>
+                </a:tc>
+                <a:tc>
+                  <a:txBody>
+                    <a:bodyPr/>
+                    <a:lstStyle/>
+                    <a:p>
+                      <a:pPr lvl="0" indent="0" marL="0" algn="l">
+                        <a:buNone/>
+                      </a:pPr>
+                      <a:r>
+                        <a:rPr/>
+                        <a:t>Bundesland</a:t>
+                      </a:r>
+                    </a:p>
+                  </a:txBody>
+                </a:tc>
+                <a:tc>
+                  <a:txBody>
+                    <a:bodyPr/>
+                    <a:lstStyle/>
+                    <a:p>
+                      <a:pPr lvl="0" indent="0" marL="0" algn="l">
+                        <a:buNone/>
+                      </a:pPr>
+                      <a:r>
+                        <a:rPr/>
+                        <a:t>major</a:t>
+                      </a:r>
+                    </a:p>
+                  </a:txBody>
+                </a:tc>
+                <a:tc>
+                  <a:txBody>
+                    <a:bodyPr/>
+                    <a:lstStyle/>
+                    <a:p>
+                      <a:pPr lvl="0" indent="0" marL="0" algn="l">
+                        <a:buNone/>
+                      </a:pPr>
+                      <a:r>
+                        <a:rPr/>
+                        <a:t>All-cause mortality</a:t>
+                      </a:r>
+                    </a:p>
+                  </a:txBody>
+                </a:tc>
+                <a:tc>
+                  <a:txBody>
+                    <a:bodyPr/>
+                    <a:lstStyle/>
+                    <a:p>
+                      <a:pPr lvl="0" indent="0" marL="0" algn="r">
+                        <a:buNone/>
+                      </a:pPr>
+                      <a:r>
+                        <a:rPr/>
+                        <a:t>8700</a:t>
+                      </a:r>
+                    </a:p>
+                  </a:txBody>
+                </a:tc>
+                <a:tc>
+                  <a:txBody>
+                    <a:bodyPr/>
+                    <a:lstStyle/>
+                    <a:p>
+                      <a:pPr lvl="0" indent="0" marL="0" algn="r">
+                        <a:buNone/>
+                      </a:pPr>
+                      <a:r>
+                        <a:rPr/>
+                        <a:t>2909567</a:t>
+                      </a:r>
+                    </a:p>
+                  </a:txBody>
+                </a:tc>
+              </a:tr>
+              <a:tr h="0">
+                <a:tc>
+                  <a:txBody>
+                    <a:bodyPr/>
+                    <a:lstStyle/>
+                    <a:p>
+                      <a:pPr lvl="0" indent="0" marL="0" algn="l">
+                        <a:buNone/>
+                      </a:pPr>
+                      <a:r>
+                        <a:rPr/>
+                        <a:t>road</a:t>
+                      </a:r>
+                    </a:p>
+                  </a:txBody>
+                </a:tc>
+                <a:tc>
+                  <a:txBody>
+                    <a:bodyPr/>
+                    <a:lstStyle/>
+                    <a:p>
+                      <a:pPr lvl="0" indent="0" marL="0" algn="l">
+                        <a:buNone/>
+                      </a:pPr>
+                      <a:r>
+                        <a:rPr/>
+                        <a:t>Bundesland</a:t>
+                      </a:r>
+                    </a:p>
+                  </a:txBody>
+                </a:tc>
+                <a:tc>
+                  <a:txBody>
+                    <a:bodyPr/>
+                    <a:lstStyle/>
+                    <a:p>
+                      <a:pPr lvl="0" indent="0" marL="0" algn="l">
+                        <a:buNone/>
+                      </a:pPr>
+                      <a:r>
+                        <a:rPr/>
+                        <a:t>major</a:t>
+                      </a:r>
+                    </a:p>
+                  </a:txBody>
+                </a:tc>
+                <a:tc>
+                  <a:txBody>
+                    <a:bodyPr/>
+                    <a:lstStyle/>
+                    <a:p>
+                      <a:pPr lvl="0" indent="0" marL="0" algn="l">
+                        <a:buNone/>
+                      </a:pPr>
+                      <a:r>
+                        <a:rPr/>
+                        <a:t>Cardiovascular disease</a:t>
+                      </a:r>
+                    </a:p>
+                  </a:txBody>
+                </a:tc>
+                <a:tc>
+                  <a:txBody>
+                    <a:bodyPr/>
+                    <a:lstStyle/>
+                    <a:p>
+                      <a:pPr lvl="0" indent="0" marL="0" algn="r">
+                        <a:buNone/>
+                      </a:pPr>
+                      <a:r>
+                        <a:rPr/>
+                        <a:t>8700</a:t>
+                      </a:r>
+                    </a:p>
+                  </a:txBody>
+                </a:tc>
+                <a:tc>
+                  <a:txBody>
+                    <a:bodyPr/>
+                    <a:lstStyle/>
+                    <a:p>
+                      <a:pPr lvl="0" indent="0" marL="0" algn="r">
+                        <a:buNone/>
+                      </a:pPr>
+                      <a:r>
+                        <a:rPr/>
+                        <a:t>2909567</a:t>
+                      </a:r>
+                    </a:p>
+                  </a:txBody>
+                </a:tc>
+              </a:tr>
+              <a:tr h="0">
+                <a:tc>
+                  <a:txBody>
+                    <a:bodyPr/>
+                    <a:lstStyle/>
+                    <a:p>
+                      <a:pPr lvl="0" indent="0" marL="0" algn="l">
+                        <a:buNone/>
+                      </a:pPr>
+                      <a:r>
+                        <a:rPr/>
+                        <a:t>road</a:t>
+                      </a:r>
+                    </a:p>
+                  </a:txBody>
+                </a:tc>
+                <a:tc>
+                  <a:txBody>
+                    <a:bodyPr/>
+                    <a:lstStyle/>
+                    <a:p>
+                      <a:pPr lvl="0" indent="0" marL="0" algn="l">
+                        <a:buNone/>
+                      </a:pPr>
+                      <a:r>
+                        <a:rPr/>
+                        <a:t>Bundesland</a:t>
+                      </a:r>
+                    </a:p>
+                  </a:txBody>
+                </a:tc>
+                <a:tc>
+                  <a:txBody>
+                    <a:bodyPr/>
+                    <a:lstStyle/>
+                    <a:p>
+                      <a:pPr lvl="0" indent="0" marL="0" algn="l">
+                        <a:buNone/>
+                      </a:pPr>
+                      <a:r>
+                        <a:rPr/>
+                        <a:t>major</a:t>
+                      </a:r>
+                    </a:p>
+                  </a:txBody>
+                </a:tc>
+                <a:tc>
+                  <a:txBody>
+                    <a:bodyPr/>
+                    <a:lstStyle/>
+                    <a:p>
+                      <a:pPr lvl="0" indent="0" marL="0" algn="l">
+                        <a:buNone/>
+                      </a:pPr>
+                      <a:r>
+                        <a:rPr/>
+                        <a:t>Diabetes</a:t>
+                      </a:r>
+                    </a:p>
+                  </a:txBody>
+                </a:tc>
+                <a:tc>
+                  <a:txBody>
+                    <a:bodyPr/>
+                    <a:lstStyle/>
+                    <a:p>
+                      <a:pPr lvl="0" indent="0" marL="0" algn="r">
+                        <a:buNone/>
+                      </a:pPr>
+                      <a:r>
+                        <a:rPr/>
+                        <a:t>8700</a:t>
+                      </a:r>
+                    </a:p>
+                  </a:txBody>
+                </a:tc>
+                <a:tc>
+                  <a:txBody>
+                    <a:bodyPr/>
+                    <a:lstStyle/>
+                    <a:p>
+                      <a:pPr lvl="0" indent="0" marL="0" algn="r">
+                        <a:buNone/>
+                      </a:pPr>
+                      <a:r>
+                        <a:rPr/>
+                        <a:t>2909567</a:t>
+                      </a:r>
+                    </a:p>
+                  </a:txBody>
+                </a:tc>
+              </a:tr>
+              <a:tr h="0">
+                <a:tc>
+                  <a:txBody>
+                    <a:bodyPr/>
+                    <a:lstStyle/>
+                    <a:p>
+                      <a:pPr lvl="0" indent="0" marL="0" algn="l">
+                        <a:buNone/>
+                      </a:pPr>
+                      <a:r>
+                        <a:rPr/>
+                        <a:t>road</a:t>
+                      </a:r>
+                    </a:p>
+                  </a:txBody>
+                </a:tc>
+                <a:tc>
+                  <a:txBody>
+                    <a:bodyPr/>
+                    <a:lstStyle/>
+                    <a:p>
+                      <a:pPr lvl="0" indent="0" marL="0" algn="l">
+                        <a:buNone/>
+                      </a:pPr>
+                      <a:r>
+                        <a:rPr/>
+                        <a:t>Bundesland</a:t>
+                      </a:r>
+                    </a:p>
+                  </a:txBody>
+                </a:tc>
+                <a:tc>
+                  <a:txBody>
+                    <a:bodyPr/>
+                    <a:lstStyle/>
+                    <a:p>
+                      <a:pPr lvl="0" indent="0" marL="0" algn="l">
+                        <a:buNone/>
+                      </a:pPr>
+                      <a:r>
+                        <a:rPr/>
+                        <a:t>major</a:t>
+                      </a:r>
+                    </a:p>
+                  </a:txBody>
+                </a:tc>
+                <a:tc>
+                  <a:txBody>
+                    <a:bodyPr/>
+                    <a:lstStyle/>
+                    <a:p>
+                      <a:pPr lvl="0" indent="0" marL="0" algn="l">
+                        <a:buNone/>
+                      </a:pPr>
+                      <a:r>
+                        <a:rPr/>
+                        <a:t>High noise annoyance</a:t>
+                      </a:r>
+                    </a:p>
+                  </a:txBody>
+                </a:tc>
+                <a:tc>
+                  <a:txBody>
+                    <a:bodyPr/>
+                    <a:lstStyle/>
+                    <a:p>
+                      <a:pPr lvl="0" indent="0" marL="0" algn="r">
+                        <a:buNone/>
+                      </a:pPr>
+                      <a:r>
+                        <a:rPr/>
+                        <a:t>8700</a:t>
+                      </a:r>
+                    </a:p>
+                  </a:txBody>
+                </a:tc>
+                <a:tc>
+                  <a:txBody>
+                    <a:bodyPr/>
+                    <a:lstStyle/>
+                    <a:p>
+                      <a:pPr lvl="0" indent="0" marL="0" algn="r">
+                        <a:buNone/>
+                      </a:pPr>
+                      <a:r>
+                        <a:rPr/>
+                        <a:t>2909567</a:t>
+                      </a:r>
+                    </a:p>
+                  </a:txBody>
+                </a:tc>
+              </a:tr>
+              <a:tr h="0">
+                <a:tc>
+                  <a:txBody>
+                    <a:bodyPr/>
+                    <a:lstStyle/>
+                    <a:p>
+                      <a:pPr lvl="0" indent="0" marL="0" algn="l">
+                        <a:buNone/>
+                      </a:pPr>
+                      <a:r>
+                        <a:rPr/>
+                        <a:t>road</a:t>
+                      </a:r>
+                    </a:p>
+                  </a:txBody>
+                </a:tc>
+                <a:tc>
+                  <a:txBody>
+                    <a:bodyPr/>
+                    <a:lstStyle/>
+                    <a:p>
+                      <a:pPr lvl="0" indent="0" marL="0" algn="l">
+                        <a:buNone/>
+                      </a:pPr>
+                      <a:r>
+                        <a:rPr/>
+                        <a:t>Bundesland</a:t>
+                      </a:r>
+                    </a:p>
+                  </a:txBody>
+                </a:tc>
+                <a:tc>
+                  <a:txBody>
+                    <a:bodyPr/>
+                    <a:lstStyle/>
+                    <a:p>
+                      <a:pPr lvl="0" indent="0" marL="0" algn="l">
+                        <a:buNone/>
+                      </a:pPr>
+                      <a:r>
+                        <a:rPr/>
+                        <a:t>major</a:t>
+                      </a:r>
+                    </a:p>
+                  </a:txBody>
+                </a:tc>
+                <a:tc>
+                  <a:txBody>
+                    <a:bodyPr/>
+                    <a:lstStyle/>
+                    <a:p>
+                      <a:pPr lvl="0" indent="0" marL="0" algn="l">
+                        <a:buNone/>
+                      </a:pPr>
+                      <a:r>
+                        <a:rPr/>
+                        <a:t>High sleep disturbance</a:t>
+                      </a:r>
+                    </a:p>
+                  </a:txBody>
+                </a:tc>
+                <a:tc>
+                  <a:txBody>
+                    <a:bodyPr/>
+                    <a:lstStyle/>
+                    <a:p>
+                      <a:pPr lvl="0" indent="0" marL="0" algn="r">
+                        <a:buNone/>
+                      </a:pPr>
+                      <a:r>
+                        <a:rPr/>
+                        <a:t>8700</a:t>
+                      </a:r>
+                    </a:p>
+                  </a:txBody>
+                </a:tc>
+                <a:tc>
+                  <a:txBody>
+                    <a:bodyPr/>
+                    <a:lstStyle/>
+                    <a:p>
+                      <a:pPr lvl="0" indent="0" marL="0" algn="r">
+                        <a:buNone/>
+                      </a:pPr>
+                      <a:r>
+                        <a:rPr/>
+                        <a:t>1800891</a:t>
+                      </a:r>
+                    </a:p>
+                  </a:txBody>
+                </a:tc>
+              </a:tr>
+              <a:tr h="0">
+                <a:tc>
+                  <a:txBody>
+                    <a:bodyPr/>
+                    <a:lstStyle/>
+                    <a:p>
+                      <a:pPr lvl="0" indent="0" marL="0" algn="l">
+                        <a:buNone/>
+                      </a:pPr>
+                      <a:r>
+                        <a:rPr/>
+                        <a:t>road</a:t>
+                      </a:r>
+                    </a:p>
+                  </a:txBody>
+                </a:tc>
+                <a:tc>
+                  <a:txBody>
+                    <a:bodyPr/>
+                    <a:lstStyle/>
+                    <a:p>
+                      <a:pPr lvl="0" indent="0" marL="0" algn="l">
+                        <a:buNone/>
+                      </a:pPr>
+                      <a:r>
+                        <a:rPr/>
+                        <a:t>EEA</a:t>
+                      </a:r>
+                    </a:p>
+                  </a:txBody>
+                </a:tc>
+                <a:tc>
+                  <a:txBody>
+                    <a:bodyPr/>
+                    <a:lstStyle/>
+                    <a:p>
+                      <a:pPr lvl="0" indent="0" marL="0" algn="l">
+                        <a:buNone/>
+                      </a:pPr>
+                      <a:r>
+                        <a:rPr/>
+                        <a:t>all</a:t>
+                      </a:r>
+                    </a:p>
+                  </a:txBody>
+                </a:tc>
+                <a:tc>
+                  <a:txBody>
+                    <a:bodyPr/>
+                    <a:lstStyle/>
+                    <a:p>
+                      <a:pPr lvl="0" indent="0" marL="0" algn="l">
+                        <a:buNone/>
+                      </a:pPr>
+                      <a:r>
+                        <a:rPr/>
+                        <a:t>All-cause mortality</a:t>
+                      </a:r>
+                    </a:p>
+                  </a:txBody>
+                </a:tc>
+                <a:tc>
+                  <a:txBody>
+                    <a:bodyPr/>
+                    <a:lstStyle/>
+                    <a:p>
+                      <a:pPr lvl="0" indent="0" marL="0" algn="r">
+                        <a:buNone/>
+                      </a:pPr>
+                      <a:r>
+                        <a:rPr/>
+                        <a:t>360</a:t>
+                      </a:r>
+                    </a:p>
+                  </a:txBody>
+                </a:tc>
+                <a:tc>
+                  <a:txBody>
+                    <a:bodyPr/>
+                    <a:lstStyle/>
+                    <a:p>
+                      <a:pPr lvl="0" indent="0" marL="0" algn="r">
+                        <a:buNone/>
+                      </a:pPr>
+                      <a:r>
+                        <a:rPr/>
+                        <a:t>10387800</a:t>
+                      </a:r>
+                    </a:p>
+                  </a:txBody>
+                </a:tc>
+              </a:tr>
+              <a:tr h="0">
+                <a:tc>
+                  <a:txBody>
+                    <a:bodyPr/>
+                    <a:lstStyle/>
+                    <a:p>
+                      <a:pPr lvl="0" indent="0" marL="0" algn="l">
+                        <a:buNone/>
+                      </a:pPr>
+                      <a:r>
+                        <a:rPr/>
+                        <a:t>road</a:t>
+                      </a:r>
+                    </a:p>
+                  </a:txBody>
+                </a:tc>
+                <a:tc>
+                  <a:txBody>
+                    <a:bodyPr/>
+                    <a:lstStyle/>
+                    <a:p>
+                      <a:pPr lvl="0" indent="0" marL="0" algn="l">
+                        <a:buNone/>
+                      </a:pPr>
+                      <a:r>
+                        <a:rPr/>
+                        <a:t>EEA</a:t>
+                      </a:r>
+                    </a:p>
+                  </a:txBody>
+                </a:tc>
+                <a:tc>
+                  <a:txBody>
+                    <a:bodyPr/>
+                    <a:lstStyle/>
+                    <a:p>
+                      <a:pPr lvl="0" indent="0" marL="0" algn="l">
+                        <a:buNone/>
+                      </a:pPr>
+                      <a:r>
+                        <a:rPr/>
+                        <a:t>all</a:t>
+                      </a:r>
+                    </a:p>
+                  </a:txBody>
+                </a:tc>
+                <a:tc>
+                  <a:txBody>
+                    <a:bodyPr/>
+                    <a:lstStyle/>
+                    <a:p>
+                      <a:pPr lvl="0" indent="0" marL="0" algn="l">
+                        <a:buNone/>
+                      </a:pPr>
+                      <a:r>
+                        <a:rPr/>
+                        <a:t>Cardiovascular disease</a:t>
+                      </a:r>
+                    </a:p>
+                  </a:txBody>
+                </a:tc>
+                <a:tc>
+                  <a:txBody>
+                    <a:bodyPr/>
+                    <a:lstStyle/>
+                    <a:p>
+                      <a:pPr lvl="0" indent="0" marL="0" algn="r">
+                        <a:buNone/>
+                      </a:pPr>
+                      <a:r>
+                        <a:rPr/>
+                        <a:t>360</a:t>
+                      </a:r>
+                    </a:p>
+                  </a:txBody>
+                </a:tc>
+                <a:tc>
+                  <a:txBody>
+                    <a:bodyPr/>
+                    <a:lstStyle/>
+                    <a:p>
+                      <a:pPr lvl="0" indent="0" marL="0" algn="r">
+                        <a:buNone/>
+                      </a:pPr>
+                      <a:r>
+                        <a:rPr/>
+                        <a:t>10387800</a:t>
+                      </a:r>
+                    </a:p>
+                  </a:txBody>
+                </a:tc>
+              </a:tr>
+              <a:tr h="0">
+                <a:tc>
+                  <a:txBody>
+                    <a:bodyPr/>
+                    <a:lstStyle/>
+                    <a:p>
+                      <a:pPr lvl="0" indent="0" marL="0" algn="l">
+                        <a:buNone/>
+                      </a:pPr>
+                      <a:r>
+                        <a:rPr/>
+                        <a:t>road</a:t>
+                      </a:r>
+                    </a:p>
+                  </a:txBody>
+                </a:tc>
+                <a:tc>
+                  <a:txBody>
+                    <a:bodyPr/>
+                    <a:lstStyle/>
+                    <a:p>
+                      <a:pPr lvl="0" indent="0" marL="0" algn="l">
+                        <a:buNone/>
+                      </a:pPr>
+                      <a:r>
+                        <a:rPr/>
+                        <a:t>EEA</a:t>
+                      </a:r>
+                    </a:p>
+                  </a:txBody>
+                </a:tc>
+                <a:tc>
+                  <a:txBody>
+                    <a:bodyPr/>
+                    <a:lstStyle/>
+                    <a:p>
+                      <a:pPr lvl="0" indent="0" marL="0" algn="l">
+                        <a:buNone/>
+                      </a:pPr>
+                      <a:r>
+                        <a:rPr/>
+                        <a:t>all</a:t>
+                      </a:r>
+                    </a:p>
+                  </a:txBody>
+                </a:tc>
+                <a:tc>
+                  <a:txBody>
+                    <a:bodyPr/>
+                    <a:lstStyle/>
+                    <a:p>
+                      <a:pPr lvl="0" indent="0" marL="0" algn="l">
+                        <a:buNone/>
+                      </a:pPr>
+                      <a:r>
+                        <a:rPr/>
+                        <a:t>Diabetes</a:t>
+                      </a:r>
+                    </a:p>
+                  </a:txBody>
+                </a:tc>
+                <a:tc>
+                  <a:txBody>
+                    <a:bodyPr/>
+                    <a:lstStyle/>
+                    <a:p>
+                      <a:pPr lvl="0" indent="0" marL="0" algn="r">
+                        <a:buNone/>
+                      </a:pPr>
+                      <a:r>
+                        <a:rPr/>
+                        <a:t>360</a:t>
+                      </a:r>
+                    </a:p>
+                  </a:txBody>
+                </a:tc>
+                <a:tc>
+                  <a:txBody>
+                    <a:bodyPr/>
+                    <a:lstStyle/>
+                    <a:p>
+                      <a:pPr lvl="0" indent="0" marL="0" algn="r">
+                        <a:buNone/>
+                      </a:pPr>
+                      <a:r>
+                        <a:rPr/>
+                        <a:t>10387800</a:t>
+                      </a:r>
+                    </a:p>
+                  </a:txBody>
+                </a:tc>
+              </a:tr>
+              <a:tr h="0">
+                <a:tc>
+                  <a:txBody>
+                    <a:bodyPr/>
+                    <a:lstStyle/>
+                    <a:p>
+                      <a:pPr lvl="0" indent="0" marL="0" algn="l">
+                        <a:buNone/>
+                      </a:pPr>
+                      <a:r>
+                        <a:rPr/>
+                        <a:t>road</a:t>
+                      </a:r>
+                    </a:p>
+                  </a:txBody>
+                </a:tc>
+                <a:tc>
+                  <a:txBody>
+                    <a:bodyPr/>
+                    <a:lstStyle/>
+                    <a:p>
+                      <a:pPr lvl="0" indent="0" marL="0" algn="l">
+                        <a:buNone/>
+                      </a:pPr>
+                      <a:r>
+                        <a:rPr/>
+                        <a:t>EEA</a:t>
+                      </a:r>
+                    </a:p>
+                  </a:txBody>
+                </a:tc>
+                <a:tc>
+                  <a:txBody>
+                    <a:bodyPr/>
+                    <a:lstStyle/>
+                    <a:p>
+                      <a:pPr lvl="0" indent="0" marL="0" algn="l">
+                        <a:buNone/>
+                      </a:pPr>
+                      <a:r>
+                        <a:rPr/>
+                        <a:t>all</a:t>
+                      </a:r>
+                    </a:p>
+                  </a:txBody>
+                </a:tc>
+                <a:tc>
+                  <a:txBody>
+                    <a:bodyPr/>
+                    <a:lstStyle/>
+                    <a:p>
+                      <a:pPr lvl="0" indent="0" marL="0" algn="l">
+                        <a:buNone/>
+                      </a:pPr>
+                      <a:r>
+                        <a:rPr/>
+                        <a:t>High noise annoyance</a:t>
+                      </a:r>
+                    </a:p>
+                  </a:txBody>
+                </a:tc>
+                <a:tc>
+                  <a:txBody>
+                    <a:bodyPr/>
+                    <a:lstStyle/>
+                    <a:p>
+                      <a:pPr lvl="0" indent="0" marL="0" algn="r">
+                        <a:buNone/>
+                      </a:pPr>
+                      <a:r>
+                        <a:rPr/>
+                        <a:t>360</a:t>
+                      </a:r>
+                    </a:p>
+                  </a:txBody>
+                </a:tc>
+                <a:tc>
+                  <a:txBody>
+                    <a:bodyPr/>
+                    <a:lstStyle/>
+                    <a:p>
+                      <a:pPr lvl="0" indent="0" marL="0" algn="r">
+                        <a:buNone/>
+                      </a:pPr>
+                      <a:r>
+                        <a:rPr/>
+                        <a:t>10387800</a:t>
+                      </a:r>
+                    </a:p>
+                  </a:txBody>
+                </a:tc>
+              </a:tr>
+              <a:tr h="0">
+                <a:tc>
+                  <a:txBody>
+                    <a:bodyPr/>
+                    <a:lstStyle/>
+                    <a:p>
+                      <a:pPr lvl="0" indent="0" marL="0" algn="l">
+                        <a:buNone/>
+                      </a:pPr>
+                      <a:r>
+                        <a:rPr/>
+                        <a:t>road</a:t>
+                      </a:r>
+                    </a:p>
+                  </a:txBody>
+                </a:tc>
+                <a:tc>
+                  <a:txBody>
+                    <a:bodyPr/>
+                    <a:lstStyle/>
+                    <a:p>
+                      <a:pPr lvl="0" indent="0" marL="0" algn="l">
+                        <a:buNone/>
+                      </a:pPr>
+                      <a:r>
+                        <a:rPr/>
+                        <a:t>EEA</a:t>
+                      </a:r>
+                    </a:p>
+                  </a:txBody>
+                </a:tc>
+                <a:tc>
+                  <a:txBody>
+                    <a:bodyPr/>
+                    <a:lstStyle/>
+                    <a:p>
+                      <a:pPr lvl="0" indent="0" marL="0" algn="l">
+                        <a:buNone/>
+                      </a:pPr>
+                      <a:r>
+                        <a:rPr/>
+                        <a:t>all</a:t>
+                      </a:r>
+                    </a:p>
+                  </a:txBody>
+                </a:tc>
+                <a:tc>
+                  <a:txBody>
+                    <a:bodyPr/>
+                    <a:lstStyle/>
+                    <a:p>
+                      <a:pPr lvl="0" indent="0" marL="0" algn="l">
+                        <a:buNone/>
+                      </a:pPr>
+                      <a:r>
+                        <a:rPr/>
+                        <a:t>High sleep disturbance</a:t>
+                      </a:r>
+                    </a:p>
+                  </a:txBody>
+                </a:tc>
+                <a:tc>
+                  <a:txBody>
+                    <a:bodyPr/>
+                    <a:lstStyle/>
+                    <a:p>
+                      <a:pPr lvl="0" indent="0" marL="0" algn="r">
+                        <a:buNone/>
+                      </a:pPr>
+                      <a:r>
+                        <a:rPr/>
+                        <a:t>360</a:t>
+                      </a:r>
+                    </a:p>
+                  </a:txBody>
+                </a:tc>
+                <a:tc>
+                  <a:txBody>
+                    <a:bodyPr/>
+                    <a:lstStyle/>
+                    <a:p>
+                      <a:pPr lvl="0" indent="0" marL="0" algn="r">
+                        <a:buNone/>
+                      </a:pPr>
+                      <a:r>
+                        <a:rPr/>
+                        <a:t>7495900</a:t>
+                      </a:r>
+                    </a:p>
+                  </a:txBody>
+                </a:tc>
+              </a:tr>
+              <a:tr h="0">
+                <a:tc>
+                  <a:txBody>
+                    <a:bodyPr/>
+                    <a:lstStyle/>
+                    <a:p>
+                      <a:pPr lvl="0" indent="0" marL="0" algn="l">
+                        <a:buNone/>
+                      </a:pPr>
+                      <a:r>
+                        <a:rPr/>
+                        <a:t>road</a:t>
+                      </a:r>
+                    </a:p>
+                  </a:txBody>
+                </a:tc>
+                <a:tc>
+                  <a:txBody>
+                    <a:bodyPr/>
+                    <a:lstStyle/>
+                    <a:p>
+                      <a:pPr lvl="0" indent="0" marL="0" algn="l">
+                        <a:buNone/>
+                      </a:pPr>
+                      <a:r>
+                        <a:rPr/>
+                        <a:t>EEA</a:t>
+                      </a:r>
+                    </a:p>
+                  </a:txBody>
+                </a:tc>
+                <a:tc>
+                  <a:txBody>
+                    <a:bodyPr/>
+                    <a:lstStyle/>
+                    <a:p>
+                      <a:pPr lvl="0" indent="0" marL="0" algn="l">
+                        <a:buNone/>
+                      </a:pPr>
+                      <a:r>
+                        <a:rPr/>
+                        <a:t>major</a:t>
+                      </a:r>
+                    </a:p>
+                  </a:txBody>
+                </a:tc>
+                <a:tc>
+                  <a:txBody>
+                    <a:bodyPr/>
+                    <a:lstStyle/>
+                    <a:p>
+                      <a:pPr lvl="0" indent="0" marL="0" algn="l">
+                        <a:buNone/>
+                      </a:pPr>
+                      <a:r>
+                        <a:rPr/>
+                        <a:t>All-cause mortality</a:t>
+                      </a:r>
+                    </a:p>
+                  </a:txBody>
+                </a:tc>
+                <a:tc>
+                  <a:txBody>
+                    <a:bodyPr/>
+                    <a:lstStyle/>
+                    <a:p>
+                      <a:pPr lvl="0" indent="0" marL="0" algn="r">
+                        <a:buNone/>
+                      </a:pPr>
+                      <a:r>
+                        <a:rPr/>
+                        <a:t>360</a:t>
+                      </a:r>
+                    </a:p>
+                  </a:txBody>
+                </a:tc>
+                <a:tc>
+                  <a:txBody>
+                    <a:bodyPr/>
+                    <a:lstStyle/>
+                    <a:p>
+                      <a:pPr lvl="0" indent="0" marL="0" algn="r">
+                        <a:buNone/>
+                      </a:pPr>
+                      <a:r>
+                        <a:rPr/>
+                        <a:t>6651200</a:t>
+                      </a:r>
+                    </a:p>
+                  </a:txBody>
+                </a:tc>
+              </a:tr>
+              <a:tr h="0">
+                <a:tc>
+                  <a:txBody>
+                    <a:bodyPr/>
+                    <a:lstStyle/>
+                    <a:p>
+                      <a:pPr lvl="0" indent="0" marL="0" algn="l">
+                        <a:buNone/>
+                      </a:pPr>
+                      <a:r>
+                        <a:rPr/>
+                        <a:t>road</a:t>
+                      </a:r>
+                    </a:p>
+                  </a:txBody>
+                </a:tc>
+                <a:tc>
+                  <a:txBody>
+                    <a:bodyPr/>
+                    <a:lstStyle/>
+                    <a:p>
+                      <a:pPr lvl="0" indent="0" marL="0" algn="l">
+                        <a:buNone/>
+                      </a:pPr>
+                      <a:r>
+                        <a:rPr/>
+                        <a:t>EEA</a:t>
+                      </a:r>
+                    </a:p>
+                  </a:txBody>
+                </a:tc>
+                <a:tc>
+                  <a:txBody>
+                    <a:bodyPr/>
+                    <a:lstStyle/>
+                    <a:p>
+                      <a:pPr lvl="0" indent="0" marL="0" algn="l">
+                        <a:buNone/>
+                      </a:pPr>
+                      <a:r>
+                        <a:rPr/>
+                        <a:t>major</a:t>
+                      </a:r>
+                    </a:p>
+                  </a:txBody>
+                </a:tc>
+                <a:tc>
+                  <a:txBody>
+                    <a:bodyPr/>
+                    <a:lstStyle/>
+                    <a:p>
+                      <a:pPr lvl="0" indent="0" marL="0" algn="l">
+                        <a:buNone/>
+                      </a:pPr>
+                      <a:r>
+                        <a:rPr/>
+                        <a:t>Cardiovascular disease</a:t>
+                      </a:r>
+                    </a:p>
+                  </a:txBody>
+                </a:tc>
+                <a:tc>
+                  <a:txBody>
+                    <a:bodyPr/>
+                    <a:lstStyle/>
+                    <a:p>
+                      <a:pPr lvl="0" indent="0" marL="0" algn="r">
+                        <a:buNone/>
+                      </a:pPr>
+                      <a:r>
+                        <a:rPr/>
+                        <a:t>360</a:t>
+                      </a:r>
+                    </a:p>
+                  </a:txBody>
+                </a:tc>
+                <a:tc>
+                  <a:txBody>
+                    <a:bodyPr/>
+                    <a:lstStyle/>
+                    <a:p>
+                      <a:pPr lvl="0" indent="0" marL="0" algn="r">
+                        <a:buNone/>
+                      </a:pPr>
+                      <a:r>
+                        <a:rPr/>
+                        <a:t>6651200</a:t>
+                      </a:r>
+                    </a:p>
+                  </a:txBody>
+                </a:tc>
+              </a:tr>
+              <a:tr h="0">
+                <a:tc>
+                  <a:txBody>
+                    <a:bodyPr/>
+                    <a:lstStyle/>
+                    <a:p>
+                      <a:pPr lvl="0" indent="0" marL="0" algn="l">
+                        <a:buNone/>
+                      </a:pPr>
+                      <a:r>
+                        <a:rPr/>
+                        <a:t>road</a:t>
+                      </a:r>
+                    </a:p>
+                  </a:txBody>
+                </a:tc>
+                <a:tc>
+                  <a:txBody>
+                    <a:bodyPr/>
+                    <a:lstStyle/>
+                    <a:p>
+                      <a:pPr lvl="0" indent="0" marL="0" algn="l">
+                        <a:buNone/>
+                      </a:pPr>
+                      <a:r>
+                        <a:rPr/>
+                        <a:t>EEA</a:t>
+                      </a:r>
+                    </a:p>
+                  </a:txBody>
+                </a:tc>
+                <a:tc>
+                  <a:txBody>
+                    <a:bodyPr/>
+                    <a:lstStyle/>
+                    <a:p>
+                      <a:pPr lvl="0" indent="0" marL="0" algn="l">
+                        <a:buNone/>
+                      </a:pPr>
+                      <a:r>
+                        <a:rPr/>
+                        <a:t>major</a:t>
+                      </a:r>
+                    </a:p>
+                  </a:txBody>
+                </a:tc>
+                <a:tc>
+                  <a:txBody>
+                    <a:bodyPr/>
+                    <a:lstStyle/>
+                    <a:p>
+                      <a:pPr lvl="0" indent="0" marL="0" algn="l">
+                        <a:buNone/>
+                      </a:pPr>
+                      <a:r>
+                        <a:rPr/>
+                        <a:t>Diabetes</a:t>
+                      </a:r>
+                    </a:p>
+                  </a:txBody>
+                </a:tc>
+                <a:tc>
+                  <a:txBody>
+                    <a:bodyPr/>
+                    <a:lstStyle/>
+                    <a:p>
+                      <a:pPr lvl="0" indent="0" marL="0" algn="r">
+                        <a:buNone/>
+                      </a:pPr>
+                      <a:r>
+                        <a:rPr/>
+                        <a:t>360</a:t>
+                      </a:r>
+                    </a:p>
+                  </a:txBody>
+                </a:tc>
+                <a:tc>
+                  <a:txBody>
+                    <a:bodyPr/>
+                    <a:lstStyle/>
+                    <a:p>
+                      <a:pPr lvl="0" indent="0" marL="0" algn="r">
+                        <a:buNone/>
+                      </a:pPr>
+                      <a:r>
+                        <a:rPr/>
+                        <a:t>6651200</a:t>
+                      </a:r>
+                    </a:p>
+                  </a:txBody>
+                </a:tc>
+              </a:tr>
+              <a:tr h="0">
+                <a:tc>
+                  <a:txBody>
+                    <a:bodyPr/>
+                    <a:lstStyle/>
+                    <a:p>
+                      <a:pPr lvl="0" indent="0" marL="0" algn="l">
+                        <a:buNone/>
+                      </a:pPr>
+                      <a:r>
+                        <a:rPr/>
+                        <a:t>road</a:t>
+                      </a:r>
+                    </a:p>
+                  </a:txBody>
+                </a:tc>
+                <a:tc>
+                  <a:txBody>
+                    <a:bodyPr/>
+                    <a:lstStyle/>
+                    <a:p>
+                      <a:pPr lvl="0" indent="0" marL="0" algn="l">
+                        <a:buNone/>
+                      </a:pPr>
+                      <a:r>
+                        <a:rPr/>
+                        <a:t>EEA</a:t>
+                      </a:r>
+                    </a:p>
+                  </a:txBody>
+                </a:tc>
+                <a:tc>
+                  <a:txBody>
+                    <a:bodyPr/>
+                    <a:lstStyle/>
+                    <a:p>
+                      <a:pPr lvl="0" indent="0" marL="0" algn="l">
+                        <a:buNone/>
+                      </a:pPr>
+                      <a:r>
+                        <a:rPr/>
+                        <a:t>major</a:t>
+                      </a:r>
+                    </a:p>
+                  </a:txBody>
+                </a:tc>
+                <a:tc>
+                  <a:txBody>
+                    <a:bodyPr/>
+                    <a:lstStyle/>
+                    <a:p>
+                      <a:pPr lvl="0" indent="0" marL="0" algn="l">
+                        <a:buNone/>
+                      </a:pPr>
+                      <a:r>
+                        <a:rPr/>
+                        <a:t>High noise annoyance</a:t>
+                      </a:r>
+                    </a:p>
+                  </a:txBody>
+                </a:tc>
+                <a:tc>
+                  <a:txBody>
+                    <a:bodyPr/>
+                    <a:lstStyle/>
+                    <a:p>
+                      <a:pPr lvl="0" indent="0" marL="0" algn="r">
+                        <a:buNone/>
+                      </a:pPr>
+                      <a:r>
+                        <a:rPr/>
+                        <a:t>360</a:t>
+                      </a:r>
+                    </a:p>
+                  </a:txBody>
+                </a:tc>
+                <a:tc>
+                  <a:txBody>
+                    <a:bodyPr/>
+                    <a:lstStyle/>
+                    <a:p>
+                      <a:pPr lvl="0" indent="0" marL="0" algn="r">
+                        <a:buNone/>
+                      </a:pPr>
+                      <a:r>
+                        <a:rPr/>
+                        <a:t>6651200</a:t>
+                      </a:r>
+                    </a:p>
+                  </a:txBody>
+                </a:tc>
+              </a:tr>
+              <a:tr h="0">
+                <a:tc>
+                  <a:txBody>
+                    <a:bodyPr/>
+                    <a:lstStyle/>
+                    <a:p>
+                      <a:pPr lvl="0" indent="0" marL="0" algn="l">
+                        <a:buNone/>
+                      </a:pPr>
+                      <a:r>
+                        <a:rPr/>
+                        <a:t>road</a:t>
+                      </a:r>
+                    </a:p>
+                  </a:txBody>
+                </a:tc>
+                <a:tc>
+                  <a:txBody>
+                    <a:bodyPr/>
+                    <a:lstStyle/>
+                    <a:p>
+                      <a:pPr lvl="0" indent="0" marL="0" algn="l">
+                        <a:buNone/>
+                      </a:pPr>
+                      <a:r>
+                        <a:rPr/>
+                        <a:t>EEA</a:t>
+                      </a:r>
+                    </a:p>
+                  </a:txBody>
+                </a:tc>
+                <a:tc>
+                  <a:txBody>
+                    <a:bodyPr/>
+                    <a:lstStyle/>
+                    <a:p>
+                      <a:pPr lvl="0" indent="0" marL="0" algn="l">
+                        <a:buNone/>
+                      </a:pPr>
+                      <a:r>
+                        <a:rPr/>
+                        <a:t>major</a:t>
+                      </a:r>
+                    </a:p>
+                  </a:txBody>
+                </a:tc>
+                <a:tc>
+                  <a:txBody>
+                    <a:bodyPr/>
+                    <a:lstStyle/>
+                    <a:p>
+                      <a:pPr lvl="0" indent="0" marL="0" algn="l">
+                        <a:buNone/>
+                      </a:pPr>
+                      <a:r>
+                        <a:rPr/>
+                        <a:t>High sleep disturbance</a:t>
+                      </a:r>
+                    </a:p>
+                  </a:txBody>
+                </a:tc>
+                <a:tc>
+                  <a:txBody>
+                    <a:bodyPr/>
+                    <a:lstStyle/>
+                    <a:p>
+                      <a:pPr lvl="0" indent="0" marL="0" algn="r">
+                        <a:buNone/>
+                      </a:pPr>
+                      <a:r>
+                        <a:rPr/>
+                        <a:t>360</a:t>
+                      </a:r>
+                    </a:p>
+                  </a:txBody>
+                </a:tc>
+                <a:tc>
+                  <a:txBody>
+                    <a:bodyPr/>
+                    <a:lstStyle/>
+                    <a:p>
+                      <a:pPr lvl="0" indent="0" marL="0" algn="r">
+                        <a:buNone/>
+                      </a:pPr>
+                      <a:r>
+                        <a:rPr/>
+                        <a:t>4763200</a:t>
+                      </a:r>
+                    </a:p>
+                  </a:txBody>
+                </a:tc>
+              </a:tr>
+            </a:tbl>
+          </a:graphicData>
+        </a:graphic>
+      </p:graphicFrame>
     </p:spTree>
   </p:cSld>
 </p:sld>
@@ -3562,7 +6361,159 @@
             </a:pPr>
             <a:r>
               <a:rPr/>
-              <a:t>Hier beispielshaft für einige Gesundheitsauswirkungen: HA, HSD, Leseverständnis.</a:t>
+              <a:t>Hier beispielshaft für einige Gesundheitsauswirkungen, zunächst die für “absolutes Risiko”: HA, HSD, Leseverständnis.</a:t>
+            </a:r>
+          </a:p>
+          <a:p>
+            <a:pPr lvl="0" indent="0">
+              <a:buNone/>
+            </a:pPr>
+            <a:r>
+              <a:rPr>
+                <a:latin typeface="Courier"/>
+              </a:rPr>
+              <a:t>[1] "hier wird diese Outcome-Liste berücksichtigt:"
+# A tibble: 2 × 3
+  outcome                source metric
+  &lt;chr&gt;                  &lt;chr&gt;  &lt;chr&gt; 
+1 High noise annoyance   road   lden  
+2 High sleep disturbance road   lnight
+[1] "Nun Kombi:"
+# A tibble: 1 × 3
+  outcome              source metric
+  &lt;chr&gt;                &lt;chr&gt;  &lt;chr&gt; 
+1 High noise annoyance road   lden  </a:t>
+            </a:r>
+          </a:p>
+          <a:p>
+            <a:pPr lvl="0" indent="0">
+              <a:buNone/>
+            </a:pPr>
+            <a:r>
+              <a:rPr>
+                <a:latin typeface="Courier"/>
+              </a:rPr>
+              <a:t>[1] "Nun Kombi:"
+# A tibble: 1 × 3
+  outcome                source metric
+  &lt;chr&gt;                  &lt;chr&gt;  &lt;chr&gt; 
+1 High sleep disturbance road   lnight</a:t>
+            </a:r>
+          </a:p>
+          <a:p>
+            <a:pPr lvl="0" indent="0">
+              <a:buNone/>
+            </a:pPr>
+            <a:r>
+              <a:rPr>
+                <a:latin typeface="Courier"/>
+              </a:rPr>
+              <a:t>[1] "hier wird diese Outcome-Liste berücksichtigt:"
+# A tibble: 7 × 3
+  outcome                source   metric
+  &lt;chr&gt;                  &lt;chr&gt;    &lt;chr&gt; 
+1 High noise annoyance   road     lden  
+2 High sleep disturbance road     lnight
+3 High noise annoyance   air      lden  
+4 Reading Comprehension  air      lden  
+5 High sleep disturbance air      lnight
+6 High noise annoyance   industry lden  
+7 High sleep disturbance industry lnight
+[1] "Nun Kombi:"
+# A tibble: 1 × 3
+  outcome              source metric
+  &lt;chr&gt;                &lt;chr&gt;  &lt;chr&gt; 
+1 High noise annoyance road   lden  </a:t>
+            </a:r>
+          </a:p>
+          <a:p>
+            <a:pPr lvl="0" indent="0">
+              <a:buNone/>
+            </a:pPr>
+            <a:r>
+              <a:rPr>
+                <a:latin typeface="Courier"/>
+              </a:rPr>
+              <a:t>[1] "Nun Kombi:"
+# A tibble: 1 × 3
+  outcome                source metric
+  &lt;chr&gt;                  &lt;chr&gt;  &lt;chr&gt; 
+1 High sleep disturbance road   lnight</a:t>
+            </a:r>
+          </a:p>
+          <a:p>
+            <a:pPr lvl="0" indent="0">
+              <a:buNone/>
+            </a:pPr>
+            <a:r>
+              <a:rPr>
+                <a:latin typeface="Courier"/>
+              </a:rPr>
+              <a:t>[1] "Nun Kombi:"
+# A tibble: 1 × 3
+  outcome              source metric
+  &lt;chr&gt;                &lt;chr&gt;  &lt;chr&gt; 
+1 High noise annoyance air    lden  </a:t>
+            </a:r>
+          </a:p>
+          <a:p>
+            <a:pPr lvl="0" indent="0">
+              <a:buNone/>
+            </a:pPr>
+            <a:r>
+              <a:rPr>
+                <a:latin typeface="Courier"/>
+              </a:rPr>
+              <a:t>[1] "Nun Kombi:"
+# A tibble: 1 × 3
+  outcome               source metric
+  &lt;chr&gt;                 &lt;chr&gt;  &lt;chr&gt; 
+1 Reading Comprehension air    lden  </a:t>
+            </a:r>
+          </a:p>
+          <a:p>
+            <a:pPr lvl="0" indent="0">
+              <a:buNone/>
+            </a:pPr>
+            <a:r>
+              <a:rPr>
+                <a:latin typeface="Courier"/>
+              </a:rPr>
+              <a:t>[1] "Nun Kombi:"
+# A tibble: 1 × 3
+  outcome                source metric
+  &lt;chr&gt;                  &lt;chr&gt;  &lt;chr&gt; 
+1 High sleep disturbance air    lnight</a:t>
+            </a:r>
+          </a:p>
+          <a:p>
+            <a:pPr lvl="0" indent="0">
+              <a:buNone/>
+            </a:pPr>
+            <a:r>
+              <a:rPr>
+                <a:latin typeface="Courier"/>
+              </a:rPr>
+              <a:t>[1] "Nun Kombi:"
+# A tibble: 1 × 3
+  outcome              source   metric
+  &lt;chr&gt;                &lt;chr&gt;    &lt;chr&gt; 
+1 High noise annoyance industry lden  </a:t>
+            </a:r>
+          </a:p>
+          <a:p>
+            <a:pPr lvl="0" indent="0">
+              <a:buNone/>
+            </a:pPr>
+            <a:r>
+              <a:rPr>
+                <a:latin typeface="Courier"/>
+              </a:rPr>
+              <a:t>[1] "Nun Kombi:"
+# A tibble: 1 × 3
+  outcome                source   metric
+  &lt;chr&gt;                  &lt;chr&gt;    &lt;chr&gt; 
+1 High sleep disturbance industry lnight</a:t>
             </a:r>
           </a:p>
         </p:txBody>
@@ -3716,7 +6667,7 @@
             </a:pPr>
             <a:r>
               <a:rPr/>
-              <a:t>Gesundheitsauswirkungen im Kreis Groß-Gerau</a:t>
+              <a:t>Gesundheitsauswirkungen in Regionen</a:t>
             </a:r>
           </a:p>
         </p:txBody>
